--- a/Comment tester le code asynchrone.pptx
+++ b/Comment tester le code asynchrone.pptx
@@ -4,27 +4,21 @@
   <p:sldMasterIdLst>
     <p:sldMasterId id="2147483648" r:id="rId1"/>
   </p:sldMasterIdLst>
+  <p:notesMasterIdLst>
+    <p:notesMasterId r:id="rId13"/>
+  </p:notesMasterIdLst>
   <p:sldIdLst>
     <p:sldId id="256" r:id="rId2"/>
-    <p:sldId id="257" r:id="rId3"/>
-    <p:sldId id="258" r:id="rId4"/>
-    <p:sldId id="259" r:id="rId5"/>
-    <p:sldId id="260" r:id="rId6"/>
-    <p:sldId id="265" r:id="rId7"/>
-    <p:sldId id="261" r:id="rId8"/>
-    <p:sldId id="262" r:id="rId9"/>
-    <p:sldId id="263" r:id="rId10"/>
-    <p:sldId id="264" r:id="rId11"/>
-    <p:sldId id="270" r:id="rId12"/>
-    <p:sldId id="269" r:id="rId13"/>
-    <p:sldId id="266" r:id="rId14"/>
-    <p:sldId id="267" r:id="rId15"/>
-    <p:sldId id="268" r:id="rId16"/>
-    <p:sldId id="271" r:id="rId17"/>
-    <p:sldId id="272" r:id="rId18"/>
-    <p:sldId id="273" r:id="rId19"/>
-    <p:sldId id="274" r:id="rId20"/>
-    <p:sldId id="275" r:id="rId21"/>
+    <p:sldId id="259" r:id="rId3"/>
+    <p:sldId id="265" r:id="rId4"/>
+    <p:sldId id="262" r:id="rId5"/>
+    <p:sldId id="263" r:id="rId6"/>
+    <p:sldId id="264" r:id="rId7"/>
+    <p:sldId id="277" r:id="rId8"/>
+    <p:sldId id="278" r:id="rId9"/>
+    <p:sldId id="276" r:id="rId10"/>
+    <p:sldId id="271" r:id="rId11"/>
+    <p:sldId id="275" r:id="rId12"/>
   </p:sldIdLst>
   <p:sldSz cx="12192000" cy="6858000"/>
   <p:notesSz cx="6858000" cy="9144000"/>
@@ -123,7 +117,1803 @@
       </a:defRPr>
     </a:lvl9pPr>
   </p:defaultTextStyle>
+  <p:extLst>
+    <p:ext uri="{EFAFB233-063F-42B5-8137-9DF3F51BA10A}">
+      <p15:sldGuideLst xmlns:p15="http://schemas.microsoft.com/office/powerpoint/2012/main"/>
+    </p:ext>
+  </p:extLst>
 </p:presentation>
+</file>
+
+<file path=ppt/revisionInfo.xml><?xml version="1.0" encoding="utf-8"?>
+<p1510:revInfo xmlns:a="http://schemas.openxmlformats.org/drawingml/2006/main" xmlns:r="http://schemas.openxmlformats.org/officeDocument/2006/relationships" xmlns:p1510="http://schemas.microsoft.com/office/powerpoint/2015/10/main">
+  <p1510:revLst>
+    <p1510:client id="{AB51FC19-7087-4DAE-BDE3-0D69A7BD722F}" v="4" dt="2025-04-08T06:15:22.038"/>
+  </p1510:revLst>
+</p1510:revInfo>
+</file>
+
+<file path=ppt/notesMasters/notesMaster1.xml><?xml version="1.0" encoding="utf-8"?>
+<p:notesMaster xmlns:a="http://schemas.openxmlformats.org/drawingml/2006/main" xmlns:r="http://schemas.openxmlformats.org/officeDocument/2006/relationships" xmlns:p="http://schemas.openxmlformats.org/presentationml/2006/main">
+  <p:cSld>
+    <p:bg>
+      <p:bgRef idx="1001">
+        <a:schemeClr val="bg1"/>
+      </p:bgRef>
+    </p:bg>
+    <p:spTree>
+      <p:nvGrpSpPr>
+        <p:cNvPr id="1" name=""/>
+        <p:cNvGrpSpPr/>
+        <p:nvPr/>
+      </p:nvGrpSpPr>
+      <p:grpSpPr>
+        <a:xfrm>
+          <a:off x="0" y="0"/>
+          <a:ext cx="0" cy="0"/>
+          <a:chOff x="0" y="0"/>
+          <a:chExt cx="0" cy="0"/>
+        </a:xfrm>
+      </p:grpSpPr>
+      <p:sp>
+        <p:nvSpPr>
+          <p:cNvPr id="2" name="Header Placeholder 1"/>
+          <p:cNvSpPr>
+            <a:spLocks noGrp="1"/>
+          </p:cNvSpPr>
+          <p:nvPr>
+            <p:ph type="hdr" sz="quarter"/>
+          </p:nvPr>
+        </p:nvSpPr>
+        <p:spPr>
+          <a:xfrm>
+            <a:off x="0" y="0"/>
+            <a:ext cx="2971800" cy="458788"/>
+          </a:xfrm>
+          <a:prstGeom prst="rect">
+            <a:avLst/>
+          </a:prstGeom>
+        </p:spPr>
+        <p:txBody>
+          <a:bodyPr vert="horz" lIns="91440" tIns="45720" rIns="91440" bIns="45720" rtlCol="0"/>
+          <a:lstStyle>
+            <a:lvl1pPr algn="l">
+              <a:defRPr sz="1200"/>
+            </a:lvl1pPr>
+          </a:lstStyle>
+          <a:p>
+            <a:endParaRPr lang="en-US"/>
+          </a:p>
+        </p:txBody>
+      </p:sp>
+      <p:sp>
+        <p:nvSpPr>
+          <p:cNvPr id="3" name="Date Placeholder 2"/>
+          <p:cNvSpPr>
+            <a:spLocks noGrp="1"/>
+          </p:cNvSpPr>
+          <p:nvPr>
+            <p:ph type="dt" idx="1"/>
+          </p:nvPr>
+        </p:nvSpPr>
+        <p:spPr>
+          <a:xfrm>
+            <a:off x="3884613" y="0"/>
+            <a:ext cx="2971800" cy="458788"/>
+          </a:xfrm>
+          <a:prstGeom prst="rect">
+            <a:avLst/>
+          </a:prstGeom>
+        </p:spPr>
+        <p:txBody>
+          <a:bodyPr vert="horz" lIns="91440" tIns="45720" rIns="91440" bIns="45720" rtlCol="0"/>
+          <a:lstStyle>
+            <a:lvl1pPr algn="r">
+              <a:defRPr sz="1200"/>
+            </a:lvl1pPr>
+          </a:lstStyle>
+          <a:p>
+            <a:fld id="{CD0CA956-3376-4892-8987-80E6809282F4}" type="datetimeFigureOut">
+              <a:rPr lang="en-US" smtClean="0"/>
+              <a:t>4/14/2025</a:t>
+            </a:fld>
+            <a:endParaRPr lang="en-US"/>
+          </a:p>
+        </p:txBody>
+      </p:sp>
+      <p:sp>
+        <p:nvSpPr>
+          <p:cNvPr id="4" name="Slide Image Placeholder 3"/>
+          <p:cNvSpPr>
+            <a:spLocks noGrp="1" noRot="1" noChangeAspect="1"/>
+          </p:cNvSpPr>
+          <p:nvPr>
+            <p:ph type="sldImg" idx="2"/>
+          </p:nvPr>
+        </p:nvSpPr>
+        <p:spPr>
+          <a:xfrm>
+            <a:off x="685800" y="1143000"/>
+            <a:ext cx="5486400" cy="3086100"/>
+          </a:xfrm>
+          <a:prstGeom prst="rect">
+            <a:avLst/>
+          </a:prstGeom>
+          <a:noFill/>
+          <a:ln w="12700">
+            <a:solidFill>
+              <a:prstClr val="black"/>
+            </a:solidFill>
+          </a:ln>
+        </p:spPr>
+        <p:txBody>
+          <a:bodyPr vert="horz" lIns="91440" tIns="45720" rIns="91440" bIns="45720" rtlCol="0" anchor="ctr"/>
+          <a:lstStyle/>
+          <a:p>
+            <a:endParaRPr lang="en-US"/>
+          </a:p>
+        </p:txBody>
+      </p:sp>
+      <p:sp>
+        <p:nvSpPr>
+          <p:cNvPr id="5" name="Notes Placeholder 4"/>
+          <p:cNvSpPr>
+            <a:spLocks noGrp="1"/>
+          </p:cNvSpPr>
+          <p:nvPr>
+            <p:ph type="body" sz="quarter" idx="3"/>
+          </p:nvPr>
+        </p:nvSpPr>
+        <p:spPr>
+          <a:xfrm>
+            <a:off x="685800" y="4400550"/>
+            <a:ext cx="5486400" cy="3600450"/>
+          </a:xfrm>
+          <a:prstGeom prst="rect">
+            <a:avLst/>
+          </a:prstGeom>
+        </p:spPr>
+        <p:txBody>
+          <a:bodyPr vert="horz" lIns="91440" tIns="45720" rIns="91440" bIns="45720" rtlCol="0"/>
+          <a:lstStyle/>
+          <a:p>
+            <a:pPr lvl="0"/>
+            <a:r>
+              <a:rPr lang="en-US"/>
+              <a:t>Click to edit Master text styles</a:t>
+            </a:r>
+          </a:p>
+          <a:p>
+            <a:pPr lvl="1"/>
+            <a:r>
+              <a:rPr lang="en-US"/>
+              <a:t>Second level</a:t>
+            </a:r>
+          </a:p>
+          <a:p>
+            <a:pPr lvl="2"/>
+            <a:r>
+              <a:rPr lang="en-US"/>
+              <a:t>Third level</a:t>
+            </a:r>
+          </a:p>
+          <a:p>
+            <a:pPr lvl="3"/>
+            <a:r>
+              <a:rPr lang="en-US"/>
+              <a:t>Fourth level</a:t>
+            </a:r>
+          </a:p>
+          <a:p>
+            <a:pPr lvl="4"/>
+            <a:r>
+              <a:rPr lang="en-US"/>
+              <a:t>Fifth level</a:t>
+            </a:r>
+          </a:p>
+        </p:txBody>
+      </p:sp>
+      <p:sp>
+        <p:nvSpPr>
+          <p:cNvPr id="6" name="Footer Placeholder 5"/>
+          <p:cNvSpPr>
+            <a:spLocks noGrp="1"/>
+          </p:cNvSpPr>
+          <p:nvPr>
+            <p:ph type="ftr" sz="quarter" idx="4"/>
+          </p:nvPr>
+        </p:nvSpPr>
+        <p:spPr>
+          <a:xfrm>
+            <a:off x="0" y="8685213"/>
+            <a:ext cx="2971800" cy="458787"/>
+          </a:xfrm>
+          <a:prstGeom prst="rect">
+            <a:avLst/>
+          </a:prstGeom>
+        </p:spPr>
+        <p:txBody>
+          <a:bodyPr vert="horz" lIns="91440" tIns="45720" rIns="91440" bIns="45720" rtlCol="0" anchor="b"/>
+          <a:lstStyle>
+            <a:lvl1pPr algn="l">
+              <a:defRPr sz="1200"/>
+            </a:lvl1pPr>
+          </a:lstStyle>
+          <a:p>
+            <a:endParaRPr lang="en-US"/>
+          </a:p>
+        </p:txBody>
+      </p:sp>
+      <p:sp>
+        <p:nvSpPr>
+          <p:cNvPr id="7" name="Slide Number Placeholder 6"/>
+          <p:cNvSpPr>
+            <a:spLocks noGrp="1"/>
+          </p:cNvSpPr>
+          <p:nvPr>
+            <p:ph type="sldNum" sz="quarter" idx="5"/>
+          </p:nvPr>
+        </p:nvSpPr>
+        <p:spPr>
+          <a:xfrm>
+            <a:off x="3884613" y="8685213"/>
+            <a:ext cx="2971800" cy="458787"/>
+          </a:xfrm>
+          <a:prstGeom prst="rect">
+            <a:avLst/>
+          </a:prstGeom>
+        </p:spPr>
+        <p:txBody>
+          <a:bodyPr vert="horz" lIns="91440" tIns="45720" rIns="91440" bIns="45720" rtlCol="0" anchor="b"/>
+          <a:lstStyle>
+            <a:lvl1pPr algn="r">
+              <a:defRPr sz="1200"/>
+            </a:lvl1pPr>
+          </a:lstStyle>
+          <a:p>
+            <a:fld id="{A5E37440-E792-4C0F-9E87-0CC1D361B8DB}" type="slidenum">
+              <a:rPr lang="en-US" smtClean="0"/>
+              <a:t>‹#›</a:t>
+            </a:fld>
+            <a:endParaRPr lang="en-US"/>
+          </a:p>
+        </p:txBody>
+      </p:sp>
+    </p:spTree>
+    <p:extLst>
+      <p:ext uri="{BB962C8B-B14F-4D97-AF65-F5344CB8AC3E}">
+        <p14:creationId xmlns:p14="http://schemas.microsoft.com/office/powerpoint/2010/main" val="3353460527"/>
+      </p:ext>
+    </p:extLst>
+  </p:cSld>
+  <p:clrMap bg1="lt1" tx1="dk1" bg2="lt2" tx2="dk2" accent1="accent1" accent2="accent2" accent3="accent3" accent4="accent4" accent5="accent5" accent6="accent6" hlink="hlink" folHlink="folHlink"/>
+  <p:notesStyle>
+    <a:lvl1pPr marL="0" algn="l" defTabSz="914400" rtl="0" eaLnBrk="1" latinLnBrk="0" hangingPunct="1">
+      <a:defRPr sz="1200" kern="1200">
+        <a:solidFill>
+          <a:schemeClr val="tx1"/>
+        </a:solidFill>
+        <a:latin typeface="+mn-lt"/>
+        <a:ea typeface="+mn-ea"/>
+        <a:cs typeface="+mn-cs"/>
+      </a:defRPr>
+    </a:lvl1pPr>
+    <a:lvl2pPr marL="457200" algn="l" defTabSz="914400" rtl="0" eaLnBrk="1" latinLnBrk="0" hangingPunct="1">
+      <a:defRPr sz="1200" kern="1200">
+        <a:solidFill>
+          <a:schemeClr val="tx1"/>
+        </a:solidFill>
+        <a:latin typeface="+mn-lt"/>
+        <a:ea typeface="+mn-ea"/>
+        <a:cs typeface="+mn-cs"/>
+      </a:defRPr>
+    </a:lvl2pPr>
+    <a:lvl3pPr marL="914400" algn="l" defTabSz="914400" rtl="0" eaLnBrk="1" latinLnBrk="0" hangingPunct="1">
+      <a:defRPr sz="1200" kern="1200">
+        <a:solidFill>
+          <a:schemeClr val="tx1"/>
+        </a:solidFill>
+        <a:latin typeface="+mn-lt"/>
+        <a:ea typeface="+mn-ea"/>
+        <a:cs typeface="+mn-cs"/>
+      </a:defRPr>
+    </a:lvl3pPr>
+    <a:lvl4pPr marL="1371600" algn="l" defTabSz="914400" rtl="0" eaLnBrk="1" latinLnBrk="0" hangingPunct="1">
+      <a:defRPr sz="1200" kern="1200">
+        <a:solidFill>
+          <a:schemeClr val="tx1"/>
+        </a:solidFill>
+        <a:latin typeface="+mn-lt"/>
+        <a:ea typeface="+mn-ea"/>
+        <a:cs typeface="+mn-cs"/>
+      </a:defRPr>
+    </a:lvl4pPr>
+    <a:lvl5pPr marL="1828800" algn="l" defTabSz="914400" rtl="0" eaLnBrk="1" latinLnBrk="0" hangingPunct="1">
+      <a:defRPr sz="1200" kern="1200">
+        <a:solidFill>
+          <a:schemeClr val="tx1"/>
+        </a:solidFill>
+        <a:latin typeface="+mn-lt"/>
+        <a:ea typeface="+mn-ea"/>
+        <a:cs typeface="+mn-cs"/>
+      </a:defRPr>
+    </a:lvl5pPr>
+    <a:lvl6pPr marL="2286000" algn="l" defTabSz="914400" rtl="0" eaLnBrk="1" latinLnBrk="0" hangingPunct="1">
+      <a:defRPr sz="1200" kern="1200">
+        <a:solidFill>
+          <a:schemeClr val="tx1"/>
+        </a:solidFill>
+        <a:latin typeface="+mn-lt"/>
+        <a:ea typeface="+mn-ea"/>
+        <a:cs typeface="+mn-cs"/>
+      </a:defRPr>
+    </a:lvl6pPr>
+    <a:lvl7pPr marL="2743200" algn="l" defTabSz="914400" rtl="0" eaLnBrk="1" latinLnBrk="0" hangingPunct="1">
+      <a:defRPr sz="1200" kern="1200">
+        <a:solidFill>
+          <a:schemeClr val="tx1"/>
+        </a:solidFill>
+        <a:latin typeface="+mn-lt"/>
+        <a:ea typeface="+mn-ea"/>
+        <a:cs typeface="+mn-cs"/>
+      </a:defRPr>
+    </a:lvl7pPr>
+    <a:lvl8pPr marL="3200400" algn="l" defTabSz="914400" rtl="0" eaLnBrk="1" latinLnBrk="0" hangingPunct="1">
+      <a:defRPr sz="1200" kern="1200">
+        <a:solidFill>
+          <a:schemeClr val="tx1"/>
+        </a:solidFill>
+        <a:latin typeface="+mn-lt"/>
+        <a:ea typeface="+mn-ea"/>
+        <a:cs typeface="+mn-cs"/>
+      </a:defRPr>
+    </a:lvl8pPr>
+    <a:lvl9pPr marL="3657600" algn="l" defTabSz="914400" rtl="0" eaLnBrk="1" latinLnBrk="0" hangingPunct="1">
+      <a:defRPr sz="1200" kern="1200">
+        <a:solidFill>
+          <a:schemeClr val="tx1"/>
+        </a:solidFill>
+        <a:latin typeface="+mn-lt"/>
+        <a:ea typeface="+mn-ea"/>
+        <a:cs typeface="+mn-cs"/>
+      </a:defRPr>
+    </a:lvl9pPr>
+  </p:notesStyle>
+</p:notesMaster>
+</file>
+
+<file path=ppt/notesSlides/notesSlide1.xml><?xml version="1.0" encoding="utf-8"?>
+<p:notes xmlns:a="http://schemas.openxmlformats.org/drawingml/2006/main" xmlns:r="http://schemas.openxmlformats.org/officeDocument/2006/relationships" xmlns:p="http://schemas.openxmlformats.org/presentationml/2006/main">
+  <p:cSld>
+    <p:spTree>
+      <p:nvGrpSpPr>
+        <p:cNvPr id="1" name=""/>
+        <p:cNvGrpSpPr/>
+        <p:nvPr/>
+      </p:nvGrpSpPr>
+      <p:grpSpPr>
+        <a:xfrm>
+          <a:off x="0" y="0"/>
+          <a:ext cx="0" cy="0"/>
+          <a:chOff x="0" y="0"/>
+          <a:chExt cx="0" cy="0"/>
+        </a:xfrm>
+      </p:grpSpPr>
+      <p:sp>
+        <p:nvSpPr>
+          <p:cNvPr id="2" name="Slide Image Placeholder 1"/>
+          <p:cNvSpPr>
+            <a:spLocks noGrp="1" noRot="1" noChangeAspect="1"/>
+          </p:cNvSpPr>
+          <p:nvPr>
+            <p:ph type="sldImg"/>
+          </p:nvPr>
+        </p:nvSpPr>
+        <p:spPr/>
+      </p:sp>
+      <p:sp>
+        <p:nvSpPr>
+          <p:cNvPr id="3" name="Notes Placeholder 2"/>
+          <p:cNvSpPr>
+            <a:spLocks noGrp="1"/>
+          </p:cNvSpPr>
+          <p:nvPr>
+            <p:ph type="body" idx="1"/>
+          </p:nvPr>
+        </p:nvSpPr>
+        <p:spPr/>
+        <p:txBody>
+          <a:bodyPr/>
+          <a:lstStyle/>
+          <a:p>
+            <a:r>
+              <a:rPr lang="fr-FR" dirty="0"/>
+              <a:t>Bonjour et bienvenue à ce talk. Merci beaucoup d'être présents. Aujourd'hui, je vais vous montrer comment maîtriser les tests de code asynchrone, à partir d'un exemple concret que j'ai rencontré dans mon travail.</a:t>
+            </a:r>
+          </a:p>
+          <a:p>
+            <a:endParaRPr lang="fr-FR" dirty="0"/>
+          </a:p>
+          <a:p>
+            <a:r>
+              <a:rPr lang="fr-FR" dirty="0"/>
+              <a:t>Je m'appelle Yifang, je suis développeuse senior chez Murex. Je travaille principalement sur Java et C++. Je suis aussi un coach technique. J'aide les équipes à mettre en place de bonnes pratiques comme le TDD, le refactoring à grande échelle, etc. Murex est une entreprise qui fournit des solutions pour les marchés financiers. Si vous souhaitez en savoir plus, n'hésitez pas à venir nous rencontrer sur notre stand au forum.</a:t>
+            </a:r>
+            <a:endParaRPr lang="fr-FR" b="0" dirty="0"/>
+          </a:p>
+        </p:txBody>
+      </p:sp>
+      <p:sp>
+        <p:nvSpPr>
+          <p:cNvPr id="4" name="Slide Number Placeholder 3"/>
+          <p:cNvSpPr>
+            <a:spLocks noGrp="1"/>
+          </p:cNvSpPr>
+          <p:nvPr>
+            <p:ph type="sldNum" sz="quarter" idx="5"/>
+          </p:nvPr>
+        </p:nvSpPr>
+        <p:spPr/>
+        <p:txBody>
+          <a:bodyPr/>
+          <a:lstStyle/>
+          <a:p>
+            <a:fld id="{A5E37440-E792-4C0F-9E87-0CC1D361B8DB}" type="slidenum">
+              <a:rPr lang="en-US" smtClean="0"/>
+              <a:t>1</a:t>
+            </a:fld>
+            <a:endParaRPr lang="en-US"/>
+          </a:p>
+        </p:txBody>
+      </p:sp>
+    </p:spTree>
+    <p:extLst>
+      <p:ext uri="{BB962C8B-B14F-4D97-AF65-F5344CB8AC3E}">
+        <p14:creationId xmlns:p14="http://schemas.microsoft.com/office/powerpoint/2010/main" val="2564937010"/>
+      </p:ext>
+    </p:extLst>
+  </p:cSld>
+  <p:clrMapOvr>
+    <a:masterClrMapping/>
+  </p:clrMapOvr>
+</p:notes>
+</file>
+
+<file path=ppt/notesSlides/notesSlide10.xml><?xml version="1.0" encoding="utf-8"?>
+<p:notes xmlns:a="http://schemas.openxmlformats.org/drawingml/2006/main" xmlns:r="http://schemas.openxmlformats.org/officeDocument/2006/relationships" xmlns:p="http://schemas.openxmlformats.org/presentationml/2006/main">
+  <p:cSld>
+    <p:spTree>
+      <p:nvGrpSpPr>
+        <p:cNvPr id="1" name=""/>
+        <p:cNvGrpSpPr/>
+        <p:nvPr/>
+      </p:nvGrpSpPr>
+      <p:grpSpPr>
+        <a:xfrm>
+          <a:off x="0" y="0"/>
+          <a:ext cx="0" cy="0"/>
+          <a:chOff x="0" y="0"/>
+          <a:chExt cx="0" cy="0"/>
+        </a:xfrm>
+      </p:grpSpPr>
+      <p:sp>
+        <p:nvSpPr>
+          <p:cNvPr id="2" name="Slide Image Placeholder 1"/>
+          <p:cNvSpPr>
+            <a:spLocks noGrp="1" noRot="1" noChangeAspect="1"/>
+          </p:cNvSpPr>
+          <p:nvPr>
+            <p:ph type="sldImg"/>
+          </p:nvPr>
+        </p:nvSpPr>
+        <p:spPr/>
+      </p:sp>
+      <p:sp>
+        <p:nvSpPr>
+          <p:cNvPr id="3" name="Notes Placeholder 2"/>
+          <p:cNvSpPr>
+            <a:spLocks noGrp="1"/>
+          </p:cNvSpPr>
+          <p:nvPr>
+            <p:ph type="body" idx="1"/>
+          </p:nvPr>
+        </p:nvSpPr>
+        <p:spPr/>
+        <p:txBody>
+          <a:bodyPr/>
+          <a:lstStyle/>
+          <a:p>
+            <a:r>
+              <a:rPr lang="en-US" dirty="0"/>
+              <a:t>Merci pour </a:t>
+            </a:r>
+            <a:r>
+              <a:rPr lang="en-US" dirty="0" err="1"/>
+              <a:t>votre</a:t>
+            </a:r>
+            <a:r>
+              <a:rPr lang="en-US" dirty="0"/>
+              <a:t> attention, </a:t>
+            </a:r>
+            <a:r>
+              <a:rPr lang="en-US" dirty="0" err="1"/>
+              <a:t>est-ce</a:t>
+            </a:r>
+            <a:r>
+              <a:rPr lang="en-US" dirty="0"/>
+              <a:t> </a:t>
+            </a:r>
+            <a:r>
+              <a:rPr lang="en-US" dirty="0" err="1"/>
+              <a:t>qu</a:t>
+            </a:r>
+            <a:r>
+              <a:rPr lang="en-US" dirty="0"/>
+              <a:t> </a:t>
+            </a:r>
+            <a:r>
+              <a:rPr lang="en-US" dirty="0" err="1"/>
+              <a:t>vous</a:t>
+            </a:r>
+            <a:r>
+              <a:rPr lang="en-US" dirty="0"/>
+              <a:t> </a:t>
+            </a:r>
+            <a:r>
+              <a:rPr lang="en-US" dirty="0" err="1"/>
+              <a:t>avez</a:t>
+            </a:r>
+            <a:r>
+              <a:rPr lang="en-US" dirty="0"/>
+              <a:t> des questions</a:t>
+            </a:r>
+          </a:p>
+        </p:txBody>
+      </p:sp>
+      <p:sp>
+        <p:nvSpPr>
+          <p:cNvPr id="4" name="Slide Number Placeholder 3"/>
+          <p:cNvSpPr>
+            <a:spLocks noGrp="1"/>
+          </p:cNvSpPr>
+          <p:nvPr>
+            <p:ph type="sldNum" sz="quarter" idx="5"/>
+          </p:nvPr>
+        </p:nvSpPr>
+        <p:spPr/>
+        <p:txBody>
+          <a:bodyPr/>
+          <a:lstStyle/>
+          <a:p>
+            <a:fld id="{A5E37440-E792-4C0F-9E87-0CC1D361B8DB}" type="slidenum">
+              <a:rPr lang="en-US" smtClean="0"/>
+              <a:t>11</a:t>
+            </a:fld>
+            <a:endParaRPr lang="en-US"/>
+          </a:p>
+        </p:txBody>
+      </p:sp>
+    </p:spTree>
+    <p:extLst>
+      <p:ext uri="{BB962C8B-B14F-4D97-AF65-F5344CB8AC3E}">
+        <p14:creationId xmlns:p14="http://schemas.microsoft.com/office/powerpoint/2010/main" val="2659370341"/>
+      </p:ext>
+    </p:extLst>
+  </p:cSld>
+  <p:clrMapOvr>
+    <a:masterClrMapping/>
+  </p:clrMapOvr>
+</p:notes>
+</file>
+
+<file path=ppt/notesSlides/notesSlide2.xml><?xml version="1.0" encoding="utf-8"?>
+<p:notes xmlns:a="http://schemas.openxmlformats.org/drawingml/2006/main" xmlns:r="http://schemas.openxmlformats.org/officeDocument/2006/relationships" xmlns:p="http://schemas.openxmlformats.org/presentationml/2006/main">
+  <p:cSld>
+    <p:spTree>
+      <p:nvGrpSpPr>
+        <p:cNvPr id="1" name=""/>
+        <p:cNvGrpSpPr/>
+        <p:nvPr/>
+      </p:nvGrpSpPr>
+      <p:grpSpPr>
+        <a:xfrm>
+          <a:off x="0" y="0"/>
+          <a:ext cx="0" cy="0"/>
+          <a:chOff x="0" y="0"/>
+          <a:chExt cx="0" cy="0"/>
+        </a:xfrm>
+      </p:grpSpPr>
+      <p:sp>
+        <p:nvSpPr>
+          <p:cNvPr id="2" name="Slide Image Placeholder 1"/>
+          <p:cNvSpPr>
+            <a:spLocks noGrp="1" noRot="1" noChangeAspect="1"/>
+          </p:cNvSpPr>
+          <p:nvPr>
+            <p:ph type="sldImg"/>
+          </p:nvPr>
+        </p:nvSpPr>
+        <p:spPr/>
+      </p:sp>
+      <p:sp>
+        <p:nvSpPr>
+          <p:cNvPr id="3" name="Notes Placeholder 2"/>
+          <p:cNvSpPr>
+            <a:spLocks noGrp="1"/>
+          </p:cNvSpPr>
+          <p:nvPr>
+            <p:ph type="body" idx="1"/>
+          </p:nvPr>
+        </p:nvSpPr>
+        <p:spPr/>
+        <p:txBody>
+          <a:bodyPr/>
+          <a:lstStyle/>
+          <a:p>
+            <a:r>
+              <a:rPr lang="fr-FR" dirty="0"/>
+              <a:t>Nous savons tou</a:t>
+            </a:r>
+            <a:r>
+              <a:rPr lang="fr-FR" b="1" dirty="0"/>
+              <a:t>s</a:t>
+            </a:r>
+            <a:r>
+              <a:rPr lang="fr-FR" dirty="0"/>
+              <a:t> que les tests sont essentiels pour garantir la qualité du code. </a:t>
+            </a:r>
+          </a:p>
+          <a:p>
+            <a:r>
+              <a:rPr lang="fr-FR" dirty="0"/>
+              <a:t>…</a:t>
+            </a:r>
+          </a:p>
+          <a:p>
+            <a:r>
+              <a:rPr lang="fr-FR" dirty="0"/>
+              <a:t>Mais tester du code asynchrone, c'est là que les choses commencent à se compliquer.</a:t>
+            </a:r>
+            <a:endParaRPr lang="en-US" dirty="0"/>
+          </a:p>
+        </p:txBody>
+      </p:sp>
+      <p:sp>
+        <p:nvSpPr>
+          <p:cNvPr id="4" name="Slide Number Placeholder 3"/>
+          <p:cNvSpPr>
+            <a:spLocks noGrp="1"/>
+          </p:cNvSpPr>
+          <p:nvPr>
+            <p:ph type="sldNum" sz="quarter" idx="5"/>
+          </p:nvPr>
+        </p:nvSpPr>
+        <p:spPr/>
+        <p:txBody>
+          <a:bodyPr/>
+          <a:lstStyle/>
+          <a:p>
+            <a:fld id="{A5E37440-E792-4C0F-9E87-0CC1D361B8DB}" type="slidenum">
+              <a:rPr lang="en-US" smtClean="0"/>
+              <a:t>2</a:t>
+            </a:fld>
+            <a:endParaRPr lang="en-US"/>
+          </a:p>
+        </p:txBody>
+      </p:sp>
+    </p:spTree>
+    <p:extLst>
+      <p:ext uri="{BB962C8B-B14F-4D97-AF65-F5344CB8AC3E}">
+        <p14:creationId xmlns:p14="http://schemas.microsoft.com/office/powerpoint/2010/main" val="3419610926"/>
+      </p:ext>
+    </p:extLst>
+  </p:cSld>
+  <p:clrMapOvr>
+    <a:masterClrMapping/>
+  </p:clrMapOvr>
+</p:notes>
+</file>
+
+<file path=ppt/notesSlides/notesSlide3.xml><?xml version="1.0" encoding="utf-8"?>
+<p:notes xmlns:a="http://schemas.openxmlformats.org/drawingml/2006/main" xmlns:r="http://schemas.openxmlformats.org/officeDocument/2006/relationships" xmlns:p="http://schemas.openxmlformats.org/presentationml/2006/main">
+  <p:cSld>
+    <p:spTree>
+      <p:nvGrpSpPr>
+        <p:cNvPr id="1" name=""/>
+        <p:cNvGrpSpPr/>
+        <p:nvPr/>
+      </p:nvGrpSpPr>
+      <p:grpSpPr>
+        <a:xfrm>
+          <a:off x="0" y="0"/>
+          <a:ext cx="0" cy="0"/>
+          <a:chOff x="0" y="0"/>
+          <a:chExt cx="0" cy="0"/>
+        </a:xfrm>
+      </p:grpSpPr>
+      <p:sp>
+        <p:nvSpPr>
+          <p:cNvPr id="2" name="Slide Image Placeholder 1"/>
+          <p:cNvSpPr>
+            <a:spLocks noGrp="1" noRot="1" noChangeAspect="1"/>
+          </p:cNvSpPr>
+          <p:nvPr>
+            <p:ph type="sldImg"/>
+          </p:nvPr>
+        </p:nvSpPr>
+        <p:spPr/>
+      </p:sp>
+      <p:sp>
+        <p:nvSpPr>
+          <p:cNvPr id="3" name="Notes Placeholder 2"/>
+          <p:cNvSpPr>
+            <a:spLocks noGrp="1"/>
+          </p:cNvSpPr>
+          <p:nvPr>
+            <p:ph type="body" idx="1"/>
+          </p:nvPr>
+        </p:nvSpPr>
+        <p:spPr/>
+        <p:txBody>
+          <a:bodyPr/>
+          <a:lstStyle/>
+          <a:p>
+            <a:r>
+              <a:rPr lang="fr-FR" dirty="0"/>
+              <a:t>Prenons une architecture classique : le système comporte deux couches : une couche session qui gère les permissions, et une couche serveur qui effectue les calculs.</a:t>
+            </a:r>
+          </a:p>
+          <a:p>
+            <a:r>
+              <a:rPr lang="fr-FR" dirty="0"/>
+              <a:t>Quand un utilisateur envoie une demande, elle passe d'abord par la couche session, qui demande à la couche serveur d'exécuter cette commande. Ensuite, le serveur effectue les calculs et envoie une notification complète à la couche session, qui applique alors les permissions puis envoie la notification avec les résultats filtrés à l'utilisateur.</a:t>
+            </a:r>
+          </a:p>
+          <a:p>
+            <a:r>
+              <a:rPr lang="fr-FR" dirty="0"/>
+              <a:t>Je voulais tester que, lorsqu'une action est effectuée par l'utilisateur, il reçoit bien la notification attendue. Il faut comprendre que dans ce système, le calcul prend du temps, et l'application des droits aussi. Pour que le serveur puisse gérer les notifications sans bloquer le traitement des autres requêtes, j'ai utilisé un pool de threads dans le serveur pour envoyer les notifications. Le même pattern est appliqué dans la couche session.</a:t>
+            </a:r>
+          </a:p>
+          <a:p>
+            <a:r>
+              <a:rPr lang="fr-FR" dirty="0"/>
+              <a:t>Aujourd'hui, pour simplifier la, nous allons juste tester la partie session.</a:t>
+            </a:r>
+            <a:endParaRPr lang="en-US" dirty="0"/>
+          </a:p>
+        </p:txBody>
+      </p:sp>
+      <p:sp>
+        <p:nvSpPr>
+          <p:cNvPr id="4" name="Slide Number Placeholder 3"/>
+          <p:cNvSpPr>
+            <a:spLocks noGrp="1"/>
+          </p:cNvSpPr>
+          <p:nvPr>
+            <p:ph type="sldNum" sz="quarter" idx="5"/>
+          </p:nvPr>
+        </p:nvSpPr>
+        <p:spPr/>
+        <p:txBody>
+          <a:bodyPr/>
+          <a:lstStyle/>
+          <a:p>
+            <a:fld id="{A5E37440-E792-4C0F-9E87-0CC1D361B8DB}" type="slidenum">
+              <a:rPr lang="en-US" smtClean="0"/>
+              <a:t>3</a:t>
+            </a:fld>
+            <a:endParaRPr lang="en-US"/>
+          </a:p>
+        </p:txBody>
+      </p:sp>
+    </p:spTree>
+    <p:extLst>
+      <p:ext uri="{BB962C8B-B14F-4D97-AF65-F5344CB8AC3E}">
+        <p14:creationId xmlns:p14="http://schemas.microsoft.com/office/powerpoint/2010/main" val="1258425735"/>
+      </p:ext>
+    </p:extLst>
+  </p:cSld>
+  <p:clrMapOvr>
+    <a:masterClrMapping/>
+  </p:clrMapOvr>
+</p:notes>
+</file>
+
+<file path=ppt/notesSlides/notesSlide4.xml><?xml version="1.0" encoding="utf-8"?>
+<p:notes xmlns:a="http://schemas.openxmlformats.org/drawingml/2006/main" xmlns:r="http://schemas.openxmlformats.org/officeDocument/2006/relationships" xmlns:p="http://schemas.openxmlformats.org/presentationml/2006/main">
+  <p:cSld>
+    <p:spTree>
+      <p:nvGrpSpPr>
+        <p:cNvPr id="1" name=""/>
+        <p:cNvGrpSpPr/>
+        <p:nvPr/>
+      </p:nvGrpSpPr>
+      <p:grpSpPr>
+        <a:xfrm>
+          <a:off x="0" y="0"/>
+          <a:ext cx="0" cy="0"/>
+          <a:chOff x="0" y="0"/>
+          <a:chExt cx="0" cy="0"/>
+        </a:xfrm>
+      </p:grpSpPr>
+      <p:sp>
+        <p:nvSpPr>
+          <p:cNvPr id="2" name="Slide Image Placeholder 1"/>
+          <p:cNvSpPr>
+            <a:spLocks noGrp="1" noRot="1" noChangeAspect="1"/>
+          </p:cNvSpPr>
+          <p:nvPr>
+            <p:ph type="sldImg"/>
+          </p:nvPr>
+        </p:nvSpPr>
+        <p:spPr/>
+      </p:sp>
+      <p:sp>
+        <p:nvSpPr>
+          <p:cNvPr id="3" name="Notes Placeholder 2"/>
+          <p:cNvSpPr>
+            <a:spLocks noGrp="1"/>
+          </p:cNvSpPr>
+          <p:nvPr>
+            <p:ph type="body" idx="1"/>
+          </p:nvPr>
+        </p:nvSpPr>
+        <p:spPr/>
+        <p:txBody>
+          <a:bodyPr/>
+          <a:lstStyle/>
+          <a:p>
+            <a:r>
+              <a:rPr lang="fr-FR" b="0" i="0" dirty="0">
+                <a:solidFill>
+                  <a:srgbClr val="424242"/>
+                </a:solidFill>
+                <a:effectLst/>
+                <a:latin typeface="Segoe Sans"/>
+              </a:rPr>
+              <a:t>Passons maintenant au code</a:t>
+            </a:r>
+            <a:endParaRPr lang="fr-FR" dirty="0"/>
+          </a:p>
+        </p:txBody>
+      </p:sp>
+      <p:sp>
+        <p:nvSpPr>
+          <p:cNvPr id="4" name="Slide Number Placeholder 3"/>
+          <p:cNvSpPr>
+            <a:spLocks noGrp="1"/>
+          </p:cNvSpPr>
+          <p:nvPr>
+            <p:ph type="sldNum" sz="quarter" idx="5"/>
+          </p:nvPr>
+        </p:nvSpPr>
+        <p:spPr/>
+        <p:txBody>
+          <a:bodyPr/>
+          <a:lstStyle/>
+          <a:p>
+            <a:fld id="{A5E37440-E792-4C0F-9E87-0CC1D361B8DB}" type="slidenum">
+              <a:rPr lang="en-US" smtClean="0"/>
+              <a:t>4</a:t>
+            </a:fld>
+            <a:endParaRPr lang="en-US"/>
+          </a:p>
+        </p:txBody>
+      </p:sp>
+    </p:spTree>
+    <p:extLst>
+      <p:ext uri="{BB962C8B-B14F-4D97-AF65-F5344CB8AC3E}">
+        <p14:creationId xmlns:p14="http://schemas.microsoft.com/office/powerpoint/2010/main" val="3654758599"/>
+      </p:ext>
+    </p:extLst>
+  </p:cSld>
+  <p:clrMapOvr>
+    <a:masterClrMapping/>
+  </p:clrMapOvr>
+</p:notes>
+</file>
+
+<file path=ppt/notesSlides/notesSlide5.xml><?xml version="1.0" encoding="utf-8"?>
+<p:notes xmlns:a="http://schemas.openxmlformats.org/drawingml/2006/main" xmlns:r="http://schemas.openxmlformats.org/officeDocument/2006/relationships" xmlns:p="http://schemas.openxmlformats.org/presentationml/2006/main">
+  <p:cSld>
+    <p:spTree>
+      <p:nvGrpSpPr>
+        <p:cNvPr id="1" name=""/>
+        <p:cNvGrpSpPr/>
+        <p:nvPr/>
+      </p:nvGrpSpPr>
+      <p:grpSpPr>
+        <a:xfrm>
+          <a:off x="0" y="0"/>
+          <a:ext cx="0" cy="0"/>
+          <a:chOff x="0" y="0"/>
+          <a:chExt cx="0" cy="0"/>
+        </a:xfrm>
+      </p:grpSpPr>
+      <p:sp>
+        <p:nvSpPr>
+          <p:cNvPr id="2" name="Slide Image Placeholder 1"/>
+          <p:cNvSpPr>
+            <a:spLocks noGrp="1" noRot="1" noChangeAspect="1"/>
+          </p:cNvSpPr>
+          <p:nvPr>
+            <p:ph type="sldImg"/>
+          </p:nvPr>
+        </p:nvSpPr>
+        <p:spPr/>
+      </p:sp>
+      <p:sp>
+        <p:nvSpPr>
+          <p:cNvPr id="3" name="Notes Placeholder 2"/>
+          <p:cNvSpPr>
+            <a:spLocks noGrp="1"/>
+          </p:cNvSpPr>
+          <p:nvPr>
+            <p:ph type="body" idx="1"/>
+          </p:nvPr>
+        </p:nvSpPr>
+        <p:spPr/>
+        <p:txBody>
+          <a:bodyPr/>
+          <a:lstStyle/>
+          <a:p>
+            <a:r>
+              <a:rPr lang="fr-FR" dirty="0"/>
+              <a:t>Il me fallait trouver une solution plus fiable. J’ai demande l’aide a mes </a:t>
+            </a:r>
+            <a:r>
+              <a:rPr lang="fr-FR" dirty="0" err="1"/>
+              <a:t>collegues</a:t>
+            </a:r>
+            <a:r>
+              <a:rPr lang="fr-FR" dirty="0"/>
+              <a:t>.</a:t>
+            </a:r>
+            <a:endParaRPr lang="en-US" dirty="0"/>
+          </a:p>
+        </p:txBody>
+      </p:sp>
+      <p:sp>
+        <p:nvSpPr>
+          <p:cNvPr id="4" name="Slide Number Placeholder 3"/>
+          <p:cNvSpPr>
+            <a:spLocks noGrp="1"/>
+          </p:cNvSpPr>
+          <p:nvPr>
+            <p:ph type="sldNum" sz="quarter" idx="5"/>
+          </p:nvPr>
+        </p:nvSpPr>
+        <p:spPr/>
+        <p:txBody>
+          <a:bodyPr/>
+          <a:lstStyle/>
+          <a:p>
+            <a:fld id="{A5E37440-E792-4C0F-9E87-0CC1D361B8DB}" type="slidenum">
+              <a:rPr lang="en-US" smtClean="0"/>
+              <a:t>6</a:t>
+            </a:fld>
+            <a:endParaRPr lang="en-US"/>
+          </a:p>
+        </p:txBody>
+      </p:sp>
+    </p:spTree>
+    <p:extLst>
+      <p:ext uri="{BB962C8B-B14F-4D97-AF65-F5344CB8AC3E}">
+        <p14:creationId xmlns:p14="http://schemas.microsoft.com/office/powerpoint/2010/main" val="3115938187"/>
+      </p:ext>
+    </p:extLst>
+  </p:cSld>
+  <p:clrMapOvr>
+    <a:masterClrMapping/>
+  </p:clrMapOvr>
+</p:notes>
+</file>
+
+<file path=ppt/notesSlides/notesSlide6.xml><?xml version="1.0" encoding="utf-8"?>
+<p:notes xmlns:a="http://schemas.openxmlformats.org/drawingml/2006/main" xmlns:r="http://schemas.openxmlformats.org/officeDocument/2006/relationships" xmlns:p="http://schemas.openxmlformats.org/presentationml/2006/main">
+  <p:cSld>
+    <p:spTree>
+      <p:nvGrpSpPr>
+        <p:cNvPr id="1" name=""/>
+        <p:cNvGrpSpPr/>
+        <p:nvPr/>
+      </p:nvGrpSpPr>
+      <p:grpSpPr>
+        <a:xfrm>
+          <a:off x="0" y="0"/>
+          <a:ext cx="0" cy="0"/>
+          <a:chOff x="0" y="0"/>
+          <a:chExt cx="0" cy="0"/>
+        </a:xfrm>
+      </p:grpSpPr>
+      <p:sp>
+        <p:nvSpPr>
+          <p:cNvPr id="2" name="Slide Image Placeholder 1"/>
+          <p:cNvSpPr>
+            <a:spLocks noGrp="1" noRot="1" noChangeAspect="1"/>
+          </p:cNvSpPr>
+          <p:nvPr>
+            <p:ph type="sldImg"/>
+          </p:nvPr>
+        </p:nvSpPr>
+        <p:spPr/>
+      </p:sp>
+      <p:sp>
+        <p:nvSpPr>
+          <p:cNvPr id="3" name="Notes Placeholder 2"/>
+          <p:cNvSpPr>
+            <a:spLocks noGrp="1"/>
+          </p:cNvSpPr>
+          <p:nvPr>
+            <p:ph type="body" idx="1"/>
+          </p:nvPr>
+        </p:nvSpPr>
+        <p:spPr/>
+        <p:txBody>
+          <a:bodyPr/>
+          <a:lstStyle/>
+          <a:p>
+            <a:pPr algn="l">
+              <a:spcBef>
+                <a:spcPts val="450"/>
+              </a:spcBef>
+              <a:spcAft>
+                <a:spcPts val="750"/>
+              </a:spcAft>
+              <a:buNone/>
+            </a:pPr>
+            <a:r>
+              <a:rPr lang="fr-FR" b="0" i="0" dirty="0">
+                <a:solidFill>
+                  <a:srgbClr val="424242"/>
+                </a:solidFill>
+                <a:effectLst/>
+                <a:latin typeface="Segoe Sans"/>
+              </a:rPr>
+              <a:t>Je ne connais pas, donc je regarde la documentation et écris quelques tests pour apprendre comment ça marche.</a:t>
+            </a:r>
+          </a:p>
+          <a:p>
+            <a:pPr algn="l">
+              <a:spcBef>
+                <a:spcPts val="450"/>
+              </a:spcBef>
+              <a:spcAft>
+                <a:spcPts val="750"/>
+              </a:spcAft>
+              <a:buNone/>
+            </a:pPr>
+            <a:r>
+              <a:rPr lang="fr-FR" b="0" i="0" dirty="0">
+                <a:solidFill>
+                  <a:srgbClr val="424242"/>
+                </a:solidFill>
+                <a:effectLst/>
+                <a:latin typeface="Segoe Sans"/>
+              </a:rPr>
+              <a:t>Un </a:t>
+            </a:r>
+            <a:r>
+              <a:rPr lang="fr-FR" b="0" i="0" dirty="0" err="1">
+                <a:solidFill>
+                  <a:srgbClr val="424242"/>
+                </a:solidFill>
+                <a:effectLst/>
+                <a:latin typeface="Segoe Sans"/>
+              </a:rPr>
+              <a:t>CompletableFuture</a:t>
+            </a:r>
+            <a:r>
+              <a:rPr lang="fr-FR" b="0" i="0" dirty="0">
+                <a:solidFill>
+                  <a:srgbClr val="424242"/>
+                </a:solidFill>
+                <a:effectLst/>
+                <a:latin typeface="Segoe Sans"/>
+              </a:rPr>
+              <a:t>, c’est comme un conteneur dont la valeur sera disponible pour nous dans le futur. </a:t>
+            </a:r>
+          </a:p>
+          <a:p>
+            <a:pPr algn="l">
+              <a:spcBef>
+                <a:spcPts val="450"/>
+              </a:spcBef>
+              <a:spcAft>
+                <a:spcPts val="750"/>
+              </a:spcAft>
+              <a:buNone/>
+            </a:pPr>
+            <a:r>
+              <a:rPr lang="fr-FR" b="0" i="0" dirty="0">
+                <a:solidFill>
+                  <a:srgbClr val="424242"/>
+                </a:solidFill>
+                <a:effectLst/>
+                <a:latin typeface="Segoe Sans"/>
+              </a:rPr>
+              <a:t>Il fournit la méthode </a:t>
+            </a:r>
+            <a:r>
+              <a:rPr lang="fr-FR" b="0" i="0" dirty="0" err="1">
+                <a:solidFill>
+                  <a:srgbClr val="424242"/>
+                </a:solidFill>
+                <a:effectLst/>
+                <a:latin typeface="Segoe Sans"/>
+              </a:rPr>
+              <a:t>isDone</a:t>
+            </a:r>
+            <a:r>
+              <a:rPr lang="fr-FR" b="0" i="0" dirty="0">
+                <a:solidFill>
+                  <a:srgbClr val="424242"/>
+                </a:solidFill>
+                <a:effectLst/>
+                <a:latin typeface="Segoe Sans"/>
+              </a:rPr>
+              <a:t>() pour vérifier si la valeur est disponible, et la méthode </a:t>
+            </a:r>
+            <a:r>
+              <a:rPr lang="fr-FR" b="0" i="0" dirty="0" err="1">
+                <a:solidFill>
+                  <a:srgbClr val="424242"/>
+                </a:solidFill>
+                <a:effectLst/>
+                <a:latin typeface="Segoe Sans"/>
+              </a:rPr>
+              <a:t>join</a:t>
+            </a:r>
+            <a:r>
+              <a:rPr lang="fr-FR" b="0" i="0" dirty="0">
+                <a:solidFill>
+                  <a:srgbClr val="424242"/>
+                </a:solidFill>
+                <a:effectLst/>
+                <a:latin typeface="Segoe Sans"/>
+              </a:rPr>
+              <a:t>() pour récupérer la valeur. Il va bloquer le thread jusqu'à ce que la valeur soit disponible. On peut aussi compléter un </a:t>
+            </a:r>
+            <a:r>
+              <a:rPr lang="fr-FR" b="0" i="0" dirty="0" err="1">
+                <a:solidFill>
+                  <a:srgbClr val="424242"/>
+                </a:solidFill>
+                <a:effectLst/>
+                <a:latin typeface="Segoe Sans"/>
+              </a:rPr>
+              <a:t>CompletableFuture</a:t>
+            </a:r>
+            <a:r>
+              <a:rPr lang="fr-FR" b="0" i="0" dirty="0">
+                <a:solidFill>
+                  <a:srgbClr val="424242"/>
+                </a:solidFill>
+                <a:effectLst/>
+                <a:latin typeface="Segoe Sans"/>
+              </a:rPr>
+              <a:t> à la main avec </a:t>
+            </a:r>
+            <a:r>
+              <a:rPr lang="fr-FR" b="0" i="0" dirty="0" err="1">
+                <a:solidFill>
+                  <a:srgbClr val="424242"/>
+                </a:solidFill>
+                <a:effectLst/>
+                <a:latin typeface="Segoe Sans"/>
+              </a:rPr>
+              <a:t>complete</a:t>
+            </a:r>
+            <a:r>
+              <a:rPr lang="fr-FR" b="0" i="0" dirty="0">
+                <a:solidFill>
+                  <a:srgbClr val="424242"/>
+                </a:solidFill>
+                <a:effectLst/>
+                <a:latin typeface="Segoe Sans"/>
+              </a:rPr>
+              <a:t>().</a:t>
+            </a:r>
+          </a:p>
+          <a:p>
+            <a:pPr algn="l">
+              <a:spcBef>
+                <a:spcPts val="450"/>
+              </a:spcBef>
+              <a:spcAft>
+                <a:spcPts val="750"/>
+              </a:spcAft>
+              <a:buNone/>
+            </a:pPr>
+            <a:r>
+              <a:rPr lang="fr-FR" b="0" i="0" dirty="0" err="1">
+                <a:solidFill>
+                  <a:srgbClr val="424242"/>
+                </a:solidFill>
+                <a:effectLst/>
+                <a:latin typeface="Segoe Sans"/>
+              </a:rPr>
+              <a:t>CompletableFuture.supplyAsync</a:t>
+            </a:r>
+            <a:r>
+              <a:rPr lang="fr-FR" b="0" i="0" dirty="0">
+                <a:solidFill>
+                  <a:srgbClr val="424242"/>
+                </a:solidFill>
+                <a:effectLst/>
+                <a:latin typeface="Segoe Sans"/>
+              </a:rPr>
+              <a:t>() et </a:t>
+            </a:r>
+            <a:r>
+              <a:rPr lang="fr-FR" b="0" i="0" dirty="0" err="1">
+                <a:solidFill>
+                  <a:srgbClr val="424242"/>
+                </a:solidFill>
+                <a:effectLst/>
+                <a:latin typeface="Segoe Sans"/>
+              </a:rPr>
+              <a:t>runAsync</a:t>
+            </a:r>
+            <a:r>
+              <a:rPr lang="fr-FR" b="0" i="0" dirty="0">
+                <a:solidFill>
+                  <a:srgbClr val="424242"/>
+                </a:solidFill>
+                <a:effectLst/>
+                <a:latin typeface="Segoe Sans"/>
+              </a:rPr>
+              <a:t> permet de lancer une tâche en parallèle et de retourner un </a:t>
+            </a:r>
+            <a:r>
+              <a:rPr lang="fr-FR" b="0" i="0" dirty="0" err="1">
+                <a:solidFill>
+                  <a:srgbClr val="424242"/>
+                </a:solidFill>
+                <a:effectLst/>
+                <a:latin typeface="Segoe Sans"/>
+              </a:rPr>
+              <a:t>CompletableFuture</a:t>
+            </a:r>
+            <a:r>
+              <a:rPr lang="fr-FR" b="0" i="0" dirty="0">
+                <a:solidFill>
+                  <a:srgbClr val="424242"/>
+                </a:solidFill>
+                <a:effectLst/>
+                <a:latin typeface="Segoe Sans"/>
+              </a:rPr>
+              <a:t> qui contiendra le résultat une fois la tâche terminée. Vous pouvez chaîner plusieurs opérations asynchrones ensemble. Par exemple, </a:t>
+            </a:r>
+            <a:r>
+              <a:rPr lang="fr-FR" b="0" i="0" dirty="0" err="1">
+                <a:solidFill>
+                  <a:srgbClr val="424242"/>
+                </a:solidFill>
+                <a:effectLst/>
+                <a:latin typeface="Segoe Sans"/>
+              </a:rPr>
+              <a:t>thenApply</a:t>
+            </a:r>
+            <a:r>
+              <a:rPr lang="fr-FR" b="0" i="0" dirty="0">
+                <a:solidFill>
+                  <a:srgbClr val="424242"/>
+                </a:solidFill>
+                <a:effectLst/>
+                <a:latin typeface="Segoe Sans"/>
+              </a:rPr>
+              <a:t>() permet de spécifier une fonction à exécuter une fois que le </a:t>
+            </a:r>
+            <a:r>
+              <a:rPr lang="fr-FR" b="0" i="0" dirty="0" err="1">
+                <a:solidFill>
+                  <a:srgbClr val="424242"/>
+                </a:solidFill>
+                <a:effectLst/>
+                <a:latin typeface="Segoe Sans"/>
+              </a:rPr>
+              <a:t>CompletableFuture</a:t>
+            </a:r>
+            <a:r>
+              <a:rPr lang="fr-FR" b="0" i="0" dirty="0">
+                <a:solidFill>
+                  <a:srgbClr val="424242"/>
+                </a:solidFill>
+                <a:effectLst/>
+                <a:latin typeface="Segoe Sans"/>
+              </a:rPr>
+              <a:t> est complété.</a:t>
+            </a:r>
+          </a:p>
+          <a:p>
+            <a:pPr algn="l">
+              <a:spcBef>
+                <a:spcPts val="450"/>
+              </a:spcBef>
+              <a:spcAft>
+                <a:spcPts val="750"/>
+              </a:spcAft>
+            </a:pPr>
+            <a:r>
+              <a:rPr lang="fr-FR" b="0" i="0" dirty="0">
+                <a:solidFill>
+                  <a:srgbClr val="424242"/>
+                </a:solidFill>
+                <a:effectLst/>
+                <a:latin typeface="Segoe Sans"/>
+              </a:rPr>
+              <a:t>On peut capturer les exceptions grâce à </a:t>
+            </a:r>
+            <a:r>
+              <a:rPr lang="fr-FR" b="0" i="0" dirty="0" err="1">
+                <a:solidFill>
+                  <a:srgbClr val="424242"/>
+                </a:solidFill>
+                <a:effectLst/>
+                <a:latin typeface="Segoe Sans"/>
+              </a:rPr>
+              <a:t>exceptionally</a:t>
+            </a:r>
+            <a:r>
+              <a:rPr lang="fr-FR" b="0" i="0" dirty="0">
+                <a:solidFill>
+                  <a:srgbClr val="424242"/>
+                </a:solidFill>
+                <a:effectLst/>
+                <a:latin typeface="Segoe Sans"/>
+              </a:rPr>
+              <a:t>(). C’est pratique pour éviter que tout plante si une tâche échoue.</a:t>
+            </a:r>
+          </a:p>
+          <a:p>
+            <a:pPr algn="l">
+              <a:spcBef>
+                <a:spcPts val="450"/>
+              </a:spcBef>
+              <a:spcAft>
+                <a:spcPts val="750"/>
+              </a:spcAft>
+            </a:pPr>
+            <a:endParaRPr lang="fr-FR" b="0" i="0" dirty="0">
+              <a:solidFill>
+                <a:srgbClr val="424242"/>
+              </a:solidFill>
+              <a:effectLst/>
+              <a:latin typeface="Segoe Sans"/>
+            </a:endParaRPr>
+          </a:p>
+          <a:p>
+            <a:pPr algn="l">
+              <a:spcBef>
+                <a:spcPts val="450"/>
+              </a:spcBef>
+              <a:spcAft>
+                <a:spcPts val="750"/>
+              </a:spcAft>
+            </a:pPr>
+            <a:r>
+              <a:rPr lang="fr-FR" b="0" i="0" dirty="0">
+                <a:solidFill>
+                  <a:srgbClr val="424242"/>
+                </a:solidFill>
+                <a:effectLst/>
+                <a:latin typeface="Segoe Sans"/>
+              </a:rPr>
+              <a:t>C’est quand mem un outil un peut complexe, n’y a-t-il pas une solution plus simple ?</a:t>
+            </a:r>
+          </a:p>
+        </p:txBody>
+      </p:sp>
+      <p:sp>
+        <p:nvSpPr>
+          <p:cNvPr id="4" name="Slide Number Placeholder 3"/>
+          <p:cNvSpPr>
+            <a:spLocks noGrp="1"/>
+          </p:cNvSpPr>
+          <p:nvPr>
+            <p:ph type="sldNum" sz="quarter" idx="5"/>
+          </p:nvPr>
+        </p:nvSpPr>
+        <p:spPr/>
+        <p:txBody>
+          <a:bodyPr/>
+          <a:lstStyle/>
+          <a:p>
+            <a:fld id="{A5E37440-E792-4C0F-9E87-0CC1D361B8DB}" type="slidenum">
+              <a:rPr lang="en-US" smtClean="0"/>
+              <a:t>7</a:t>
+            </a:fld>
+            <a:endParaRPr lang="en-US"/>
+          </a:p>
+        </p:txBody>
+      </p:sp>
+    </p:spTree>
+    <p:extLst>
+      <p:ext uri="{BB962C8B-B14F-4D97-AF65-F5344CB8AC3E}">
+        <p14:creationId xmlns:p14="http://schemas.microsoft.com/office/powerpoint/2010/main" val="2763366686"/>
+      </p:ext>
+    </p:extLst>
+  </p:cSld>
+  <p:clrMapOvr>
+    <a:masterClrMapping/>
+  </p:clrMapOvr>
+</p:notes>
+</file>
+
+<file path=ppt/notesSlides/notesSlide7.xml><?xml version="1.0" encoding="utf-8"?>
+<p:notes xmlns:a="http://schemas.openxmlformats.org/drawingml/2006/main" xmlns:r="http://schemas.openxmlformats.org/officeDocument/2006/relationships" xmlns:p="http://schemas.openxmlformats.org/presentationml/2006/main">
+  <p:cSld>
+    <p:spTree>
+      <p:nvGrpSpPr>
+        <p:cNvPr id="1" name=""/>
+        <p:cNvGrpSpPr/>
+        <p:nvPr/>
+      </p:nvGrpSpPr>
+      <p:grpSpPr>
+        <a:xfrm>
+          <a:off x="0" y="0"/>
+          <a:ext cx="0" cy="0"/>
+          <a:chOff x="0" y="0"/>
+          <a:chExt cx="0" cy="0"/>
+        </a:xfrm>
+      </p:grpSpPr>
+      <p:sp>
+        <p:nvSpPr>
+          <p:cNvPr id="2" name="Slide Image Placeholder 1"/>
+          <p:cNvSpPr>
+            <a:spLocks noGrp="1" noRot="1" noChangeAspect="1"/>
+          </p:cNvSpPr>
+          <p:nvPr>
+            <p:ph type="sldImg"/>
+          </p:nvPr>
+        </p:nvSpPr>
+        <p:spPr/>
+      </p:sp>
+      <p:sp>
+        <p:nvSpPr>
+          <p:cNvPr id="3" name="Notes Placeholder 2"/>
+          <p:cNvSpPr>
+            <a:spLocks noGrp="1"/>
+          </p:cNvSpPr>
+          <p:nvPr>
+            <p:ph type="body" idx="1"/>
+          </p:nvPr>
+        </p:nvSpPr>
+        <p:spPr/>
+        <p:txBody>
+          <a:bodyPr/>
+          <a:lstStyle/>
+          <a:p>
+            <a:r>
+              <a:rPr lang="fr-FR" dirty="0"/>
+              <a:t>Le concept de </a:t>
+            </a:r>
+            <a:r>
+              <a:rPr lang="fr-FR" b="1" dirty="0" err="1"/>
+              <a:t>CountDownLatch</a:t>
+            </a:r>
+            <a:r>
+              <a:rPr lang="fr-FR" dirty="0"/>
+              <a:t> est très simple. Imaginez-le comme une porte qui est initialement fermée et qui peut être ouverte. Lorsque la porte est ouverte, tous les threads peuvent passe. Cependant, lorsqu'elle est fermée, tous les threads doivent attendre.</a:t>
+            </a:r>
+            <a:br>
+              <a:rPr lang="fr-FR" dirty="0"/>
+            </a:br>
+            <a:r>
+              <a:rPr lang="fr-FR" dirty="0"/>
+              <a:t>Le </a:t>
+            </a:r>
+            <a:r>
+              <a:rPr lang="fr-FR" b="1" dirty="0" err="1"/>
+              <a:t>CountDownLatch</a:t>
+            </a:r>
+            <a:r>
+              <a:rPr lang="fr-FR" dirty="0"/>
+              <a:t> fonctionne avec un compteur. Ce compteur diminue à chaque fois que nous appelons la méthode </a:t>
+            </a:r>
+            <a:r>
+              <a:rPr lang="fr-FR" b="1" dirty="0" err="1"/>
+              <a:t>countDown</a:t>
+            </a:r>
+            <a:r>
+              <a:rPr lang="fr-FR" dirty="0"/>
+              <a:t>. Lorsqu'il atteint zéro, la porte s'ouvre et il ne peut pas refermer.</a:t>
+            </a:r>
+            <a:br>
+              <a:rPr lang="fr-FR" dirty="0"/>
+            </a:br>
+            <a:r>
+              <a:rPr lang="fr-FR" dirty="0"/>
+              <a:t>Ce concept est particulièrement utile lors du démarrage d'une application. Au démarrage, plusieurs ressources doivent être initialisées dans différents threads. Une fois ces initialisations terminées, les threads principaux de l'application peuvent démarrer.</a:t>
+            </a:r>
+          </a:p>
+          <a:p>
+            <a:r>
+              <a:rPr lang="fr-FR" dirty="0"/>
+              <a:t>coordonner plusieurs tâches avant de lancer un événement</a:t>
+            </a:r>
+            <a:endParaRPr lang="en-US" dirty="0"/>
+          </a:p>
+          <a:p>
+            <a:endParaRPr lang="fr-FR" dirty="0"/>
+          </a:p>
+        </p:txBody>
+      </p:sp>
+      <p:sp>
+        <p:nvSpPr>
+          <p:cNvPr id="4" name="Slide Number Placeholder 3"/>
+          <p:cNvSpPr>
+            <a:spLocks noGrp="1"/>
+          </p:cNvSpPr>
+          <p:nvPr>
+            <p:ph type="sldNum" sz="quarter" idx="5"/>
+          </p:nvPr>
+        </p:nvSpPr>
+        <p:spPr/>
+        <p:txBody>
+          <a:bodyPr/>
+          <a:lstStyle/>
+          <a:p>
+            <a:fld id="{A5E37440-E792-4C0F-9E87-0CC1D361B8DB}" type="slidenum">
+              <a:rPr lang="en-US" smtClean="0"/>
+              <a:t>8</a:t>
+            </a:fld>
+            <a:endParaRPr lang="en-US"/>
+          </a:p>
+        </p:txBody>
+      </p:sp>
+    </p:spTree>
+    <p:extLst>
+      <p:ext uri="{BB962C8B-B14F-4D97-AF65-F5344CB8AC3E}">
+        <p14:creationId xmlns:p14="http://schemas.microsoft.com/office/powerpoint/2010/main" val="85668396"/>
+      </p:ext>
+    </p:extLst>
+  </p:cSld>
+  <p:clrMapOvr>
+    <a:masterClrMapping/>
+  </p:clrMapOvr>
+</p:notes>
+</file>
+
+<file path=ppt/notesSlides/notesSlide8.xml><?xml version="1.0" encoding="utf-8"?>
+<p:notes xmlns:a="http://schemas.openxmlformats.org/drawingml/2006/main" xmlns:r="http://schemas.openxmlformats.org/officeDocument/2006/relationships" xmlns:p="http://schemas.openxmlformats.org/presentationml/2006/main">
+  <p:cSld>
+    <p:spTree>
+      <p:nvGrpSpPr>
+        <p:cNvPr id="1" name=""/>
+        <p:cNvGrpSpPr/>
+        <p:nvPr/>
+      </p:nvGrpSpPr>
+      <p:grpSpPr>
+        <a:xfrm>
+          <a:off x="0" y="0"/>
+          <a:ext cx="0" cy="0"/>
+          <a:chOff x="0" y="0"/>
+          <a:chExt cx="0" cy="0"/>
+        </a:xfrm>
+      </p:grpSpPr>
+      <p:sp>
+        <p:nvSpPr>
+          <p:cNvPr id="2" name="Slide Image Placeholder 1"/>
+          <p:cNvSpPr>
+            <a:spLocks noGrp="1" noRot="1" noChangeAspect="1"/>
+          </p:cNvSpPr>
+          <p:nvPr>
+            <p:ph type="sldImg"/>
+          </p:nvPr>
+        </p:nvSpPr>
+        <p:spPr/>
+      </p:sp>
+      <p:sp>
+        <p:nvSpPr>
+          <p:cNvPr id="3" name="Notes Placeholder 2"/>
+          <p:cNvSpPr>
+            <a:spLocks noGrp="1"/>
+          </p:cNvSpPr>
+          <p:nvPr>
+            <p:ph type="body" idx="1"/>
+          </p:nvPr>
+        </p:nvSpPr>
+        <p:spPr/>
+        <p:txBody>
+          <a:bodyPr/>
+          <a:lstStyle/>
+          <a:p>
+            <a:r>
+              <a:rPr lang="fr-FR" dirty="0"/>
+              <a:t>Je suis content et montre à mes collègues pour une revue de code. Lors de la revue de code, un collègue m'a demandé :</a:t>
+            </a:r>
+          </a:p>
+        </p:txBody>
+      </p:sp>
+      <p:sp>
+        <p:nvSpPr>
+          <p:cNvPr id="4" name="Slide Number Placeholder 3"/>
+          <p:cNvSpPr>
+            <a:spLocks noGrp="1"/>
+          </p:cNvSpPr>
+          <p:nvPr>
+            <p:ph type="sldNum" sz="quarter" idx="5"/>
+          </p:nvPr>
+        </p:nvSpPr>
+        <p:spPr/>
+        <p:txBody>
+          <a:bodyPr/>
+          <a:lstStyle/>
+          <a:p>
+            <a:fld id="{A5E37440-E792-4C0F-9E87-0CC1D361B8DB}" type="slidenum">
+              <a:rPr lang="en-US" smtClean="0"/>
+              <a:t>9</a:t>
+            </a:fld>
+            <a:endParaRPr lang="en-US"/>
+          </a:p>
+        </p:txBody>
+      </p:sp>
+    </p:spTree>
+    <p:extLst>
+      <p:ext uri="{BB962C8B-B14F-4D97-AF65-F5344CB8AC3E}">
+        <p14:creationId xmlns:p14="http://schemas.microsoft.com/office/powerpoint/2010/main" val="5379846"/>
+      </p:ext>
+    </p:extLst>
+  </p:cSld>
+  <p:clrMapOvr>
+    <a:masterClrMapping/>
+  </p:clrMapOvr>
+</p:notes>
+</file>
+
+<file path=ppt/notesSlides/notesSlide9.xml><?xml version="1.0" encoding="utf-8"?>
+<p:notes xmlns:a="http://schemas.openxmlformats.org/drawingml/2006/main" xmlns:r="http://schemas.openxmlformats.org/officeDocument/2006/relationships" xmlns:p="http://schemas.openxmlformats.org/presentationml/2006/main">
+  <p:cSld>
+    <p:spTree>
+      <p:nvGrpSpPr>
+        <p:cNvPr id="1" name=""/>
+        <p:cNvGrpSpPr/>
+        <p:nvPr/>
+      </p:nvGrpSpPr>
+      <p:grpSpPr>
+        <a:xfrm>
+          <a:off x="0" y="0"/>
+          <a:ext cx="0" cy="0"/>
+          <a:chOff x="0" y="0"/>
+          <a:chExt cx="0" cy="0"/>
+        </a:xfrm>
+      </p:grpSpPr>
+      <p:sp>
+        <p:nvSpPr>
+          <p:cNvPr id="2" name="Slide Image Placeholder 1"/>
+          <p:cNvSpPr>
+            <a:spLocks noGrp="1" noRot="1" noChangeAspect="1"/>
+          </p:cNvSpPr>
+          <p:nvPr>
+            <p:ph type="sldImg"/>
+          </p:nvPr>
+        </p:nvSpPr>
+        <p:spPr/>
+      </p:sp>
+      <p:sp>
+        <p:nvSpPr>
+          <p:cNvPr id="3" name="Notes Placeholder 2"/>
+          <p:cNvSpPr>
+            <a:spLocks noGrp="1"/>
+          </p:cNvSpPr>
+          <p:nvPr>
+            <p:ph type="body" idx="1"/>
+          </p:nvPr>
+        </p:nvSpPr>
+        <p:spPr/>
+        <p:txBody>
+          <a:bodyPr/>
+          <a:lstStyle/>
+          <a:p>
+            <a:r>
+              <a:rPr lang="en-US" dirty="0" err="1"/>
+              <a:t>Eviter</a:t>
+            </a:r>
+            <a:r>
+              <a:rPr lang="en-US" dirty="0"/>
+              <a:t> les sleep, car </a:t>
+            </a:r>
+            <a:r>
+              <a:rPr lang="en-US" dirty="0" err="1"/>
+              <a:t>ils</a:t>
+            </a:r>
+            <a:r>
+              <a:rPr lang="en-US" dirty="0"/>
+              <a:t> </a:t>
+            </a:r>
+            <a:r>
+              <a:rPr lang="en-US" dirty="0" err="1"/>
+              <a:t>rendent</a:t>
+            </a:r>
+            <a:r>
+              <a:rPr lang="en-US" dirty="0"/>
+              <a:t> les tests </a:t>
+            </a:r>
+            <a:r>
+              <a:rPr lang="en-US" dirty="0" err="1"/>
+              <a:t>instables</a:t>
+            </a:r>
+            <a:endParaRPr lang="en-US" dirty="0"/>
+          </a:p>
+          <a:p>
+            <a:r>
+              <a:rPr lang="en-US" dirty="0" err="1"/>
+              <a:t>Utiliser</a:t>
+            </a:r>
+            <a:r>
+              <a:rPr lang="en-US" dirty="0"/>
+              <a:t> des </a:t>
+            </a:r>
+            <a:r>
+              <a:rPr lang="en-US" dirty="0" err="1"/>
+              <a:t>outils</a:t>
+            </a:r>
+            <a:r>
+              <a:rPr lang="en-US" dirty="0"/>
+              <a:t> de synchronization pour </a:t>
+            </a:r>
+            <a:r>
+              <a:rPr lang="en-US" dirty="0" err="1"/>
+              <a:t>fiabiliser</a:t>
+            </a:r>
+            <a:r>
+              <a:rPr lang="en-US" dirty="0"/>
+              <a:t> les tests</a:t>
+            </a:r>
+          </a:p>
+          <a:p>
+            <a:r>
+              <a:rPr lang="en-US" dirty="0"/>
+              <a:t>Injecter les dependances pour render le code testable </a:t>
+            </a:r>
+            <a:r>
+              <a:rPr lang="en-US" dirty="0" err="1"/>
+              <a:t>facilement</a:t>
+            </a:r>
+            <a:endParaRPr lang="en-US" dirty="0"/>
+          </a:p>
+          <a:p>
+            <a:endParaRPr lang="en-US" dirty="0"/>
+          </a:p>
+        </p:txBody>
+      </p:sp>
+      <p:sp>
+        <p:nvSpPr>
+          <p:cNvPr id="4" name="Slide Number Placeholder 3"/>
+          <p:cNvSpPr>
+            <a:spLocks noGrp="1"/>
+          </p:cNvSpPr>
+          <p:nvPr>
+            <p:ph type="sldNum" sz="quarter" idx="5"/>
+          </p:nvPr>
+        </p:nvSpPr>
+        <p:spPr/>
+        <p:txBody>
+          <a:bodyPr/>
+          <a:lstStyle/>
+          <a:p>
+            <a:fld id="{A5E37440-E792-4C0F-9E87-0CC1D361B8DB}" type="slidenum">
+              <a:rPr lang="en-US" smtClean="0"/>
+              <a:t>10</a:t>
+            </a:fld>
+            <a:endParaRPr lang="en-US"/>
+          </a:p>
+        </p:txBody>
+      </p:sp>
+    </p:spTree>
+    <p:extLst>
+      <p:ext uri="{BB962C8B-B14F-4D97-AF65-F5344CB8AC3E}">
+        <p14:creationId xmlns:p14="http://schemas.microsoft.com/office/powerpoint/2010/main" val="4294929833"/>
+      </p:ext>
+    </p:extLst>
+  </p:cSld>
+  <p:clrMapOvr>
+    <a:masterClrMapping/>
+  </p:clrMapOvr>
+</p:notes>
 </file>
 
 <file path=ppt/slideLayouts/slideLayout1.xml><?xml version="1.0" encoding="utf-8"?>
@@ -273,7 +2063,7 @@
           <a:p>
             <a:fld id="{58551476-D84D-4606-9E60-E11DC6FEDE3D}" type="datetimeFigureOut">
               <a:rPr lang="en-US" smtClean="0"/>
-              <a:t>1/9/2025</a:t>
+              <a:t>4/14/2025</a:t>
             </a:fld>
             <a:endParaRPr lang="en-US"/>
           </a:p>
@@ -471,7 +2261,7 @@
           <a:p>
             <a:fld id="{58551476-D84D-4606-9E60-E11DC6FEDE3D}" type="datetimeFigureOut">
               <a:rPr lang="en-US" smtClean="0"/>
-              <a:t>1/9/2025</a:t>
+              <a:t>4/14/2025</a:t>
             </a:fld>
             <a:endParaRPr lang="en-US"/>
           </a:p>
@@ -679,7 +2469,7 @@
           <a:p>
             <a:fld id="{58551476-D84D-4606-9E60-E11DC6FEDE3D}" type="datetimeFigureOut">
               <a:rPr lang="en-US" smtClean="0"/>
-              <a:t>1/9/2025</a:t>
+              <a:t>4/14/2025</a:t>
             </a:fld>
             <a:endParaRPr lang="en-US"/>
           </a:p>
@@ -877,7 +2667,7 @@
           <a:p>
             <a:fld id="{58551476-D84D-4606-9E60-E11DC6FEDE3D}" type="datetimeFigureOut">
               <a:rPr lang="en-US" smtClean="0"/>
-              <a:t>1/9/2025</a:t>
+              <a:t>4/14/2025</a:t>
             </a:fld>
             <a:endParaRPr lang="en-US"/>
           </a:p>
@@ -1152,7 +2942,7 @@
           <a:p>
             <a:fld id="{58551476-D84D-4606-9E60-E11DC6FEDE3D}" type="datetimeFigureOut">
               <a:rPr lang="en-US" smtClean="0"/>
-              <a:t>1/9/2025</a:t>
+              <a:t>4/14/2025</a:t>
             </a:fld>
             <a:endParaRPr lang="en-US"/>
           </a:p>
@@ -1417,7 +3207,7 @@
           <a:p>
             <a:fld id="{58551476-D84D-4606-9E60-E11DC6FEDE3D}" type="datetimeFigureOut">
               <a:rPr lang="en-US" smtClean="0"/>
-              <a:t>1/9/2025</a:t>
+              <a:t>4/14/2025</a:t>
             </a:fld>
             <a:endParaRPr lang="en-US"/>
           </a:p>
@@ -1829,7 +3619,7 @@
           <a:p>
             <a:fld id="{58551476-D84D-4606-9E60-E11DC6FEDE3D}" type="datetimeFigureOut">
               <a:rPr lang="en-US" smtClean="0"/>
-              <a:t>1/9/2025</a:t>
+              <a:t>4/14/2025</a:t>
             </a:fld>
             <a:endParaRPr lang="en-US"/>
           </a:p>
@@ -1970,7 +3760,7 @@
           <a:p>
             <a:fld id="{58551476-D84D-4606-9E60-E11DC6FEDE3D}" type="datetimeFigureOut">
               <a:rPr lang="en-US" smtClean="0"/>
-              <a:t>1/9/2025</a:t>
+              <a:t>4/14/2025</a:t>
             </a:fld>
             <a:endParaRPr lang="en-US"/>
           </a:p>
@@ -2083,7 +3873,7 @@
           <a:p>
             <a:fld id="{58551476-D84D-4606-9E60-E11DC6FEDE3D}" type="datetimeFigureOut">
               <a:rPr lang="en-US" smtClean="0"/>
-              <a:t>1/9/2025</a:t>
+              <a:t>4/14/2025</a:t>
             </a:fld>
             <a:endParaRPr lang="en-US"/>
           </a:p>
@@ -2394,7 +4184,7 @@
           <a:p>
             <a:fld id="{58551476-D84D-4606-9E60-E11DC6FEDE3D}" type="datetimeFigureOut">
               <a:rPr lang="en-US" smtClean="0"/>
-              <a:t>1/9/2025</a:t>
+              <a:t>4/14/2025</a:t>
             </a:fld>
             <a:endParaRPr lang="en-US"/>
           </a:p>
@@ -2682,7 +4472,7 @@
           <a:p>
             <a:fld id="{58551476-D84D-4606-9E60-E11DC6FEDE3D}" type="datetimeFigureOut">
               <a:rPr lang="en-US" smtClean="0"/>
-              <a:t>1/9/2025</a:t>
+              <a:t>4/14/2025</a:t>
             </a:fld>
             <a:endParaRPr lang="en-US"/>
           </a:p>
@@ -2923,7 +4713,7 @@
           <a:p>
             <a:fld id="{58551476-D84D-4606-9E60-E11DC6FEDE3D}" type="datetimeFigureOut">
               <a:rPr lang="en-US" smtClean="0"/>
-              <a:t>1/9/2025</a:t>
+              <a:t>4/14/2025</a:t>
             </a:fld>
             <a:endParaRPr lang="en-US"/>
           </a:p>
@@ -3361,7 +5151,7 @@
           <a:bodyPr/>
           <a:lstStyle/>
           <a:p>
-            <a:endParaRPr lang="en-US"/>
+            <a:endParaRPr lang="fr-FR" noProof="0" dirty="0"/>
           </a:p>
         </p:txBody>
       </p:sp>
@@ -3386,46 +5176,16 @@
           <a:bodyPr/>
           <a:lstStyle/>
           <a:p>
-            <a:endParaRPr lang="en-US"/>
+            <a:endParaRPr lang="fr-FR" noProof="0" dirty="0"/>
           </a:p>
         </p:txBody>
       </p:sp>
       <p:pic>
         <p:nvPicPr>
-          <p:cNvPr id="7" name="Picture 6">
-            <a:extLst>
-              <a:ext uri="{FF2B5EF4-FFF2-40B4-BE49-F238E27FC236}">
-                <a16:creationId xmlns:a16="http://schemas.microsoft.com/office/drawing/2014/main" id="{88AD4932-1EB8-8DFD-83EB-268DC1E9A770}"/>
-              </a:ext>
-            </a:extLst>
-          </p:cNvPr>
-          <p:cNvPicPr>
-            <a:picLocks noChangeAspect="1"/>
-          </p:cNvPicPr>
-          <p:nvPr/>
-        </p:nvPicPr>
-        <p:blipFill>
-          <a:blip r:embed="rId2"/>
-          <a:stretch>
-            <a:fillRect/>
-          </a:stretch>
-        </p:blipFill>
-        <p:spPr>
-          <a:xfrm>
-            <a:off x="0" y="0"/>
-            <a:ext cx="12192000" cy="6858000"/>
-          </a:xfrm>
-          <a:prstGeom prst="rect">
-            <a:avLst/>
-          </a:prstGeom>
-        </p:spPr>
-      </p:pic>
-      <p:pic>
-        <p:nvPicPr>
-          <p:cNvPr id="9" name="Picture 8">
-            <a:extLst>
-              <a:ext uri="{FF2B5EF4-FFF2-40B4-BE49-F238E27FC236}">
-                <a16:creationId xmlns:a16="http://schemas.microsoft.com/office/drawing/2014/main" id="{E0490410-13CD-60AF-3B5E-B703A65D9E80}"/>
+          <p:cNvPr id="6" name="Picture 5">
+            <a:extLst>
+              <a:ext uri="{FF2B5EF4-FFF2-40B4-BE49-F238E27FC236}">
+                <a16:creationId xmlns:a16="http://schemas.microsoft.com/office/drawing/2014/main" id="{F84FCBAA-7F45-406E-CA31-BE56DC0B93D3}"/>
               </a:ext>
             </a:extLst>
           </p:cNvPr>
@@ -3436,36 +5196,6 @@
         </p:nvPicPr>
         <p:blipFill>
           <a:blip r:embed="rId3"/>
-          <a:stretch>
-            <a:fillRect/>
-          </a:stretch>
-        </p:blipFill>
-        <p:spPr>
-          <a:xfrm>
-            <a:off x="0" y="0"/>
-            <a:ext cx="12192000" cy="6858000"/>
-          </a:xfrm>
-          <a:prstGeom prst="rect">
-            <a:avLst/>
-          </a:prstGeom>
-        </p:spPr>
-      </p:pic>
-      <p:pic>
-        <p:nvPicPr>
-          <p:cNvPr id="11" name="Picture 10">
-            <a:extLst>
-              <a:ext uri="{FF2B5EF4-FFF2-40B4-BE49-F238E27FC236}">
-                <a16:creationId xmlns:a16="http://schemas.microsoft.com/office/drawing/2014/main" id="{79A9002F-657E-3B78-ECD1-1985C6277327}"/>
-              </a:ext>
-            </a:extLst>
-          </p:cNvPr>
-          <p:cNvPicPr>
-            <a:picLocks noChangeAspect="1"/>
-          </p:cNvPicPr>
-          <p:nvPr/>
-        </p:nvPicPr>
-        <p:blipFill>
-          <a:blip r:embed="rId2"/>
           <a:stretch>
             <a:fillRect/>
           </a:stretch>
@@ -3515,7 +5245,7 @@
           <p:cNvPr id="2" name="Title 1">
             <a:extLst>
               <a:ext uri="{FF2B5EF4-FFF2-40B4-BE49-F238E27FC236}">
-                <a16:creationId xmlns:a16="http://schemas.microsoft.com/office/drawing/2014/main" id="{9DDE3D56-5B6A-7237-AC05-39C4C57C79D7}"/>
+                <a16:creationId xmlns:a16="http://schemas.microsoft.com/office/drawing/2014/main" id="{427F3C2A-B5FA-0202-540B-96F8FDB71298}"/>
               </a:ext>
             </a:extLst>
           </p:cNvPr>
@@ -3531,7 +5261,7 @@
           <a:bodyPr/>
           <a:lstStyle/>
           <a:p>
-            <a:endParaRPr lang="en-US"/>
+            <a:endParaRPr lang="fr-FR" noProof="0" dirty="0"/>
           </a:p>
         </p:txBody>
       </p:sp>
@@ -3540,7 +5270,7 @@
           <p:cNvPr id="3" name="Content Placeholder 2">
             <a:extLst>
               <a:ext uri="{FF2B5EF4-FFF2-40B4-BE49-F238E27FC236}">
-                <a16:creationId xmlns:a16="http://schemas.microsoft.com/office/drawing/2014/main" id="{AB1ACF22-C056-9CB7-A296-F73F7F2A26A0}"/>
+                <a16:creationId xmlns:a16="http://schemas.microsoft.com/office/drawing/2014/main" id="{8211FFAC-C754-B063-414F-77A2B1E87985}"/>
               </a:ext>
             </a:extLst>
           </p:cNvPr>
@@ -3556,7 +5286,7 @@
           <a:bodyPr/>
           <a:lstStyle/>
           <a:p>
-            <a:endParaRPr lang="en-US"/>
+            <a:endParaRPr lang="fr-FR" noProof="0" dirty="0"/>
           </a:p>
         </p:txBody>
       </p:sp>
@@ -3565,7 +5295,617 @@
           <p:cNvPr id="5" name="Picture 4">
             <a:extLst>
               <a:ext uri="{FF2B5EF4-FFF2-40B4-BE49-F238E27FC236}">
-                <a16:creationId xmlns:a16="http://schemas.microsoft.com/office/drawing/2014/main" id="{F1E63575-E933-8B05-7207-45DB8BE88B82}"/>
+                <a16:creationId xmlns:a16="http://schemas.microsoft.com/office/drawing/2014/main" id="{6B05E9A9-CB4B-7A26-D161-0AF9674D26A4}"/>
+              </a:ext>
+            </a:extLst>
+          </p:cNvPr>
+          <p:cNvPicPr>
+            <a:picLocks noChangeAspect="1"/>
+          </p:cNvPicPr>
+          <p:nvPr/>
+        </p:nvPicPr>
+        <p:blipFill>
+          <a:blip r:embed="rId3"/>
+          <a:stretch>
+            <a:fillRect/>
+          </a:stretch>
+        </p:blipFill>
+        <p:spPr>
+          <a:xfrm>
+            <a:off x="0" y="0"/>
+            <a:ext cx="12192000" cy="6858000"/>
+          </a:xfrm>
+          <a:prstGeom prst="rect">
+            <a:avLst/>
+          </a:prstGeom>
+        </p:spPr>
+      </p:pic>
+      <p:pic>
+        <p:nvPicPr>
+          <p:cNvPr id="6" name="Picture 5">
+            <a:extLst>
+              <a:ext uri="{FF2B5EF4-FFF2-40B4-BE49-F238E27FC236}">
+                <a16:creationId xmlns:a16="http://schemas.microsoft.com/office/drawing/2014/main" id="{7F92D1A1-33DF-32EA-8F84-07E9CB019F10}"/>
+              </a:ext>
+            </a:extLst>
+          </p:cNvPr>
+          <p:cNvPicPr>
+            <a:picLocks noChangeAspect="1"/>
+          </p:cNvPicPr>
+          <p:nvPr/>
+        </p:nvPicPr>
+        <p:blipFill>
+          <a:blip r:embed="rId4"/>
+          <a:stretch>
+            <a:fillRect/>
+          </a:stretch>
+        </p:blipFill>
+        <p:spPr>
+          <a:xfrm>
+            <a:off x="0" y="0"/>
+            <a:ext cx="12192000" cy="6858000"/>
+          </a:xfrm>
+          <a:prstGeom prst="rect">
+            <a:avLst/>
+          </a:prstGeom>
+        </p:spPr>
+      </p:pic>
+      <p:pic>
+        <p:nvPicPr>
+          <p:cNvPr id="8" name="Picture 7">
+            <a:extLst>
+              <a:ext uri="{FF2B5EF4-FFF2-40B4-BE49-F238E27FC236}">
+                <a16:creationId xmlns:a16="http://schemas.microsoft.com/office/drawing/2014/main" id="{659066A6-BF84-79E3-1FA0-373C94763071}"/>
+              </a:ext>
+            </a:extLst>
+          </p:cNvPr>
+          <p:cNvPicPr>
+            <a:picLocks noChangeAspect="1"/>
+          </p:cNvPicPr>
+          <p:nvPr/>
+        </p:nvPicPr>
+        <p:blipFill>
+          <a:blip r:embed="rId5"/>
+          <a:stretch>
+            <a:fillRect/>
+          </a:stretch>
+        </p:blipFill>
+        <p:spPr>
+          <a:xfrm>
+            <a:off x="0" y="0"/>
+            <a:ext cx="12192000" cy="6858000"/>
+          </a:xfrm>
+          <a:prstGeom prst="rect">
+            <a:avLst/>
+          </a:prstGeom>
+        </p:spPr>
+      </p:pic>
+    </p:spTree>
+    <p:extLst>
+      <p:ext uri="{BB962C8B-B14F-4D97-AF65-F5344CB8AC3E}">
+        <p14:creationId xmlns:p14="http://schemas.microsoft.com/office/powerpoint/2010/main" val="1089341589"/>
+      </p:ext>
+    </p:extLst>
+  </p:cSld>
+  <p:clrMapOvr>
+    <a:masterClrMapping/>
+  </p:clrMapOvr>
+</p:sld>
+</file>
+
+<file path=ppt/slides/slide11.xml><?xml version="1.0" encoding="utf-8"?>
+<p:sld xmlns:a="http://schemas.openxmlformats.org/drawingml/2006/main" xmlns:r="http://schemas.openxmlformats.org/officeDocument/2006/relationships" xmlns:p="http://schemas.openxmlformats.org/presentationml/2006/main">
+  <p:cSld>
+    <p:spTree>
+      <p:nvGrpSpPr>
+        <p:cNvPr id="1" name=""/>
+        <p:cNvGrpSpPr/>
+        <p:nvPr/>
+      </p:nvGrpSpPr>
+      <p:grpSpPr>
+        <a:xfrm>
+          <a:off x="0" y="0"/>
+          <a:ext cx="0" cy="0"/>
+          <a:chOff x="0" y="0"/>
+          <a:chExt cx="0" cy="0"/>
+        </a:xfrm>
+      </p:grpSpPr>
+      <p:sp>
+        <p:nvSpPr>
+          <p:cNvPr id="2" name="Title 1">
+            <a:extLst>
+              <a:ext uri="{FF2B5EF4-FFF2-40B4-BE49-F238E27FC236}">
+                <a16:creationId xmlns:a16="http://schemas.microsoft.com/office/drawing/2014/main" id="{494140F7-22AF-2ACF-10D8-501FCC981CD6}"/>
+              </a:ext>
+            </a:extLst>
+          </p:cNvPr>
+          <p:cNvSpPr>
+            <a:spLocks noGrp="1"/>
+          </p:cNvSpPr>
+          <p:nvPr>
+            <p:ph type="title"/>
+          </p:nvPr>
+        </p:nvSpPr>
+        <p:spPr/>
+        <p:txBody>
+          <a:bodyPr/>
+          <a:lstStyle/>
+          <a:p>
+            <a:endParaRPr lang="fr-FR" noProof="0" dirty="0"/>
+          </a:p>
+        </p:txBody>
+      </p:sp>
+      <p:sp>
+        <p:nvSpPr>
+          <p:cNvPr id="9" name="Content Placeholder 8">
+            <a:extLst>
+              <a:ext uri="{FF2B5EF4-FFF2-40B4-BE49-F238E27FC236}">
+                <a16:creationId xmlns:a16="http://schemas.microsoft.com/office/drawing/2014/main" id="{8046C4BC-4C5C-4412-6AB7-656C783AB759}"/>
+              </a:ext>
+            </a:extLst>
+          </p:cNvPr>
+          <p:cNvSpPr>
+            <a:spLocks noGrp="1"/>
+          </p:cNvSpPr>
+          <p:nvPr>
+            <p:ph idx="1"/>
+          </p:nvPr>
+        </p:nvSpPr>
+        <p:spPr/>
+        <p:txBody>
+          <a:bodyPr/>
+          <a:lstStyle/>
+          <a:p>
+            <a:endParaRPr lang="fr-FR" noProof="0" dirty="0"/>
+          </a:p>
+        </p:txBody>
+      </p:sp>
+      <p:pic>
+        <p:nvPicPr>
+          <p:cNvPr id="4" name="Picture 3">
+            <a:extLst>
+              <a:ext uri="{FF2B5EF4-FFF2-40B4-BE49-F238E27FC236}">
+                <a16:creationId xmlns:a16="http://schemas.microsoft.com/office/drawing/2014/main" id="{F4FBC6E9-56C2-A1E3-6DE3-4E64F5EFD336}"/>
+              </a:ext>
+            </a:extLst>
+          </p:cNvPr>
+          <p:cNvPicPr>
+            <a:picLocks noChangeAspect="1"/>
+          </p:cNvPicPr>
+          <p:nvPr/>
+        </p:nvPicPr>
+        <p:blipFill>
+          <a:blip r:embed="rId3"/>
+          <a:stretch>
+            <a:fillRect/>
+          </a:stretch>
+        </p:blipFill>
+        <p:spPr>
+          <a:xfrm>
+            <a:off x="0" y="0"/>
+            <a:ext cx="12192000" cy="6858000"/>
+          </a:xfrm>
+          <a:prstGeom prst="rect">
+            <a:avLst/>
+          </a:prstGeom>
+        </p:spPr>
+      </p:pic>
+    </p:spTree>
+    <p:extLst>
+      <p:ext uri="{BB962C8B-B14F-4D97-AF65-F5344CB8AC3E}">
+        <p14:creationId xmlns:p14="http://schemas.microsoft.com/office/powerpoint/2010/main" val="2785072448"/>
+      </p:ext>
+    </p:extLst>
+  </p:cSld>
+  <p:clrMapOvr>
+    <a:masterClrMapping/>
+  </p:clrMapOvr>
+</p:sld>
+</file>
+
+<file path=ppt/slides/slide2.xml><?xml version="1.0" encoding="utf-8"?>
+<p:sld xmlns:a="http://schemas.openxmlformats.org/drawingml/2006/main" xmlns:r="http://schemas.openxmlformats.org/officeDocument/2006/relationships" xmlns:p="http://schemas.openxmlformats.org/presentationml/2006/main">
+  <p:cSld>
+    <p:spTree>
+      <p:nvGrpSpPr>
+        <p:cNvPr id="1" name=""/>
+        <p:cNvGrpSpPr/>
+        <p:nvPr/>
+      </p:nvGrpSpPr>
+      <p:grpSpPr>
+        <a:xfrm>
+          <a:off x="0" y="0"/>
+          <a:ext cx="0" cy="0"/>
+          <a:chOff x="0" y="0"/>
+          <a:chExt cx="0" cy="0"/>
+        </a:xfrm>
+      </p:grpSpPr>
+      <p:sp>
+        <p:nvSpPr>
+          <p:cNvPr id="2" name="Title 1">
+            <a:extLst>
+              <a:ext uri="{FF2B5EF4-FFF2-40B4-BE49-F238E27FC236}">
+                <a16:creationId xmlns:a16="http://schemas.microsoft.com/office/drawing/2014/main" id="{F14B18A6-6ACB-666A-A756-0AE5F1C8DB28}"/>
+              </a:ext>
+            </a:extLst>
+          </p:cNvPr>
+          <p:cNvSpPr>
+            <a:spLocks noGrp="1"/>
+          </p:cNvSpPr>
+          <p:nvPr>
+            <p:ph type="title"/>
+          </p:nvPr>
+        </p:nvSpPr>
+        <p:spPr/>
+        <p:txBody>
+          <a:bodyPr/>
+          <a:lstStyle/>
+          <a:p>
+            <a:endParaRPr lang="fr-FR" noProof="0" dirty="0"/>
+          </a:p>
+        </p:txBody>
+      </p:sp>
+      <p:sp>
+        <p:nvSpPr>
+          <p:cNvPr id="3" name="Content Placeholder 2">
+            <a:extLst>
+              <a:ext uri="{FF2B5EF4-FFF2-40B4-BE49-F238E27FC236}">
+                <a16:creationId xmlns:a16="http://schemas.microsoft.com/office/drawing/2014/main" id="{45D896D2-A227-758F-1DFB-052B0C2004EC}"/>
+              </a:ext>
+            </a:extLst>
+          </p:cNvPr>
+          <p:cNvSpPr>
+            <a:spLocks noGrp="1"/>
+          </p:cNvSpPr>
+          <p:nvPr>
+            <p:ph idx="1"/>
+          </p:nvPr>
+        </p:nvSpPr>
+        <p:spPr/>
+        <p:txBody>
+          <a:bodyPr/>
+          <a:lstStyle/>
+          <a:p>
+            <a:endParaRPr lang="fr-FR" noProof="0" dirty="0"/>
+          </a:p>
+        </p:txBody>
+      </p:sp>
+      <p:pic>
+        <p:nvPicPr>
+          <p:cNvPr id="5" name="Picture 4">
+            <a:extLst>
+              <a:ext uri="{FF2B5EF4-FFF2-40B4-BE49-F238E27FC236}">
+                <a16:creationId xmlns:a16="http://schemas.microsoft.com/office/drawing/2014/main" id="{50F9141A-245F-A027-9989-CFC7B26B0AF5}"/>
+              </a:ext>
+            </a:extLst>
+          </p:cNvPr>
+          <p:cNvPicPr>
+            <a:picLocks noChangeAspect="1"/>
+          </p:cNvPicPr>
+          <p:nvPr/>
+        </p:nvPicPr>
+        <p:blipFill>
+          <a:blip r:embed="rId3"/>
+          <a:stretch>
+            <a:fillRect/>
+          </a:stretch>
+        </p:blipFill>
+        <p:spPr>
+          <a:xfrm>
+            <a:off x="112889" y="0"/>
+            <a:ext cx="12192000" cy="6858000"/>
+          </a:xfrm>
+          <a:prstGeom prst="rect">
+            <a:avLst/>
+          </a:prstGeom>
+        </p:spPr>
+      </p:pic>
+    </p:spTree>
+    <p:extLst>
+      <p:ext uri="{BB962C8B-B14F-4D97-AF65-F5344CB8AC3E}">
+        <p14:creationId xmlns:p14="http://schemas.microsoft.com/office/powerpoint/2010/main" val="3243850376"/>
+      </p:ext>
+    </p:extLst>
+  </p:cSld>
+  <p:clrMapOvr>
+    <a:masterClrMapping/>
+  </p:clrMapOvr>
+</p:sld>
+</file>
+
+<file path=ppt/slides/slide3.xml><?xml version="1.0" encoding="utf-8"?>
+<p:sld xmlns:a="http://schemas.openxmlformats.org/drawingml/2006/main" xmlns:r="http://schemas.openxmlformats.org/officeDocument/2006/relationships" xmlns:p="http://schemas.openxmlformats.org/presentationml/2006/main">
+  <p:cSld>
+    <p:spTree>
+      <p:nvGrpSpPr>
+        <p:cNvPr id="1" name=""/>
+        <p:cNvGrpSpPr/>
+        <p:nvPr/>
+      </p:nvGrpSpPr>
+      <p:grpSpPr>
+        <a:xfrm>
+          <a:off x="0" y="0"/>
+          <a:ext cx="0" cy="0"/>
+          <a:chOff x="0" y="0"/>
+          <a:chExt cx="0" cy="0"/>
+        </a:xfrm>
+      </p:grpSpPr>
+      <p:sp>
+        <p:nvSpPr>
+          <p:cNvPr id="2" name="Title 1">
+            <a:extLst>
+              <a:ext uri="{FF2B5EF4-FFF2-40B4-BE49-F238E27FC236}">
+                <a16:creationId xmlns:a16="http://schemas.microsoft.com/office/drawing/2014/main" id="{B51E9F69-89FC-0F72-FF95-140003358C36}"/>
+              </a:ext>
+            </a:extLst>
+          </p:cNvPr>
+          <p:cNvSpPr>
+            <a:spLocks noGrp="1"/>
+          </p:cNvSpPr>
+          <p:nvPr>
+            <p:ph type="title"/>
+          </p:nvPr>
+        </p:nvSpPr>
+        <p:spPr/>
+        <p:txBody>
+          <a:bodyPr/>
+          <a:lstStyle/>
+          <a:p>
+            <a:endParaRPr lang="fr-FR" noProof="0" dirty="0"/>
+          </a:p>
+        </p:txBody>
+      </p:sp>
+      <p:sp>
+        <p:nvSpPr>
+          <p:cNvPr id="3" name="Content Placeholder 2">
+            <a:extLst>
+              <a:ext uri="{FF2B5EF4-FFF2-40B4-BE49-F238E27FC236}">
+                <a16:creationId xmlns:a16="http://schemas.microsoft.com/office/drawing/2014/main" id="{B3C3938E-CCC1-F946-A2B4-A16BC5A7D012}"/>
+              </a:ext>
+            </a:extLst>
+          </p:cNvPr>
+          <p:cNvSpPr>
+            <a:spLocks noGrp="1"/>
+          </p:cNvSpPr>
+          <p:nvPr>
+            <p:ph idx="1"/>
+          </p:nvPr>
+        </p:nvSpPr>
+        <p:spPr/>
+        <p:txBody>
+          <a:bodyPr/>
+          <a:lstStyle/>
+          <a:p>
+            <a:endParaRPr lang="fr-FR" noProof="0" dirty="0"/>
+          </a:p>
+        </p:txBody>
+      </p:sp>
+      <p:pic>
+        <p:nvPicPr>
+          <p:cNvPr id="6" name="Picture 5">
+            <a:extLst>
+              <a:ext uri="{FF2B5EF4-FFF2-40B4-BE49-F238E27FC236}">
+                <a16:creationId xmlns:a16="http://schemas.microsoft.com/office/drawing/2014/main" id="{FF9E28AB-C7C9-D706-5FFC-1E01B8369204}"/>
+              </a:ext>
+            </a:extLst>
+          </p:cNvPr>
+          <p:cNvPicPr>
+            <a:picLocks noChangeAspect="1"/>
+          </p:cNvPicPr>
+          <p:nvPr/>
+        </p:nvPicPr>
+        <p:blipFill>
+          <a:blip r:embed="rId3"/>
+          <a:stretch>
+            <a:fillRect/>
+          </a:stretch>
+        </p:blipFill>
+        <p:spPr>
+          <a:xfrm>
+            <a:off x="0" y="0"/>
+            <a:ext cx="12192000" cy="6858000"/>
+          </a:xfrm>
+          <a:prstGeom prst="rect">
+            <a:avLst/>
+          </a:prstGeom>
+        </p:spPr>
+      </p:pic>
+    </p:spTree>
+    <p:extLst>
+      <p:ext uri="{BB962C8B-B14F-4D97-AF65-F5344CB8AC3E}">
+        <p14:creationId xmlns:p14="http://schemas.microsoft.com/office/powerpoint/2010/main" val="1028410373"/>
+      </p:ext>
+    </p:extLst>
+  </p:cSld>
+  <p:clrMapOvr>
+    <a:masterClrMapping/>
+  </p:clrMapOvr>
+</p:sld>
+</file>
+
+<file path=ppt/slides/slide4.xml><?xml version="1.0" encoding="utf-8"?>
+<p:sld xmlns:a="http://schemas.openxmlformats.org/drawingml/2006/main" xmlns:r="http://schemas.openxmlformats.org/officeDocument/2006/relationships" xmlns:p="http://schemas.openxmlformats.org/presentationml/2006/main">
+  <p:cSld>
+    <p:spTree>
+      <p:nvGrpSpPr>
+        <p:cNvPr id="1" name=""/>
+        <p:cNvGrpSpPr/>
+        <p:nvPr/>
+      </p:nvGrpSpPr>
+      <p:grpSpPr>
+        <a:xfrm>
+          <a:off x="0" y="0"/>
+          <a:ext cx="0" cy="0"/>
+          <a:chOff x="0" y="0"/>
+          <a:chExt cx="0" cy="0"/>
+        </a:xfrm>
+      </p:grpSpPr>
+      <p:sp>
+        <p:nvSpPr>
+          <p:cNvPr id="2" name="Title 1">
+            <a:extLst>
+              <a:ext uri="{FF2B5EF4-FFF2-40B4-BE49-F238E27FC236}">
+                <a16:creationId xmlns:a16="http://schemas.microsoft.com/office/drawing/2014/main" id="{8803A4F4-8D9E-90CF-A461-A91A759B4DA7}"/>
+              </a:ext>
+            </a:extLst>
+          </p:cNvPr>
+          <p:cNvSpPr>
+            <a:spLocks noGrp="1"/>
+          </p:cNvSpPr>
+          <p:nvPr>
+            <p:ph type="title"/>
+          </p:nvPr>
+        </p:nvSpPr>
+        <p:spPr/>
+        <p:txBody>
+          <a:bodyPr/>
+          <a:lstStyle/>
+          <a:p>
+            <a:endParaRPr lang="fr-FR" noProof="0" dirty="0"/>
+          </a:p>
+        </p:txBody>
+      </p:sp>
+      <p:sp>
+        <p:nvSpPr>
+          <p:cNvPr id="3" name="Content Placeholder 2">
+            <a:extLst>
+              <a:ext uri="{FF2B5EF4-FFF2-40B4-BE49-F238E27FC236}">
+                <a16:creationId xmlns:a16="http://schemas.microsoft.com/office/drawing/2014/main" id="{E9E4914B-F91A-6F42-ABF0-A44267EE5F3B}"/>
+              </a:ext>
+            </a:extLst>
+          </p:cNvPr>
+          <p:cNvSpPr>
+            <a:spLocks noGrp="1"/>
+          </p:cNvSpPr>
+          <p:nvPr>
+            <p:ph idx="1"/>
+          </p:nvPr>
+        </p:nvSpPr>
+        <p:spPr/>
+        <p:txBody>
+          <a:bodyPr/>
+          <a:lstStyle/>
+          <a:p>
+            <a:endParaRPr lang="fr-FR" noProof="0" dirty="0"/>
+          </a:p>
+        </p:txBody>
+      </p:sp>
+      <p:pic>
+        <p:nvPicPr>
+          <p:cNvPr id="5" name="Picture 4">
+            <a:extLst>
+              <a:ext uri="{FF2B5EF4-FFF2-40B4-BE49-F238E27FC236}">
+                <a16:creationId xmlns:a16="http://schemas.microsoft.com/office/drawing/2014/main" id="{FC2FE4C0-7438-E27D-C2F9-8C30FE999BC2}"/>
+              </a:ext>
+            </a:extLst>
+          </p:cNvPr>
+          <p:cNvPicPr>
+            <a:picLocks noChangeAspect="1"/>
+          </p:cNvPicPr>
+          <p:nvPr/>
+        </p:nvPicPr>
+        <p:blipFill>
+          <a:blip r:embed="rId3"/>
+          <a:stretch>
+            <a:fillRect/>
+          </a:stretch>
+        </p:blipFill>
+        <p:spPr>
+          <a:xfrm>
+            <a:off x="0" y="0"/>
+            <a:ext cx="12192000" cy="6858000"/>
+          </a:xfrm>
+          <a:prstGeom prst="rect">
+            <a:avLst/>
+          </a:prstGeom>
+        </p:spPr>
+      </p:pic>
+    </p:spTree>
+    <p:extLst>
+      <p:ext uri="{BB962C8B-B14F-4D97-AF65-F5344CB8AC3E}">
+        <p14:creationId xmlns:p14="http://schemas.microsoft.com/office/powerpoint/2010/main" val="764632822"/>
+      </p:ext>
+    </p:extLst>
+  </p:cSld>
+  <p:clrMapOvr>
+    <a:masterClrMapping/>
+  </p:clrMapOvr>
+</p:sld>
+</file>
+
+<file path=ppt/slides/slide5.xml><?xml version="1.0" encoding="utf-8"?>
+<p:sld xmlns:a="http://schemas.openxmlformats.org/drawingml/2006/main" xmlns:r="http://schemas.openxmlformats.org/officeDocument/2006/relationships" xmlns:p="http://schemas.openxmlformats.org/presentationml/2006/main">
+  <p:cSld>
+    <p:spTree>
+      <p:nvGrpSpPr>
+        <p:cNvPr id="1" name=""/>
+        <p:cNvGrpSpPr/>
+        <p:nvPr/>
+      </p:nvGrpSpPr>
+      <p:grpSpPr>
+        <a:xfrm>
+          <a:off x="0" y="0"/>
+          <a:ext cx="0" cy="0"/>
+          <a:chOff x="0" y="0"/>
+          <a:chExt cx="0" cy="0"/>
+        </a:xfrm>
+      </p:grpSpPr>
+      <p:sp>
+        <p:nvSpPr>
+          <p:cNvPr id="2" name="Title 1">
+            <a:extLst>
+              <a:ext uri="{FF2B5EF4-FFF2-40B4-BE49-F238E27FC236}">
+                <a16:creationId xmlns:a16="http://schemas.microsoft.com/office/drawing/2014/main" id="{D4E63E90-C306-E3A3-A572-7CBA4AE3CB83}"/>
+              </a:ext>
+            </a:extLst>
+          </p:cNvPr>
+          <p:cNvSpPr>
+            <a:spLocks noGrp="1"/>
+          </p:cNvSpPr>
+          <p:nvPr>
+            <p:ph type="title"/>
+          </p:nvPr>
+        </p:nvSpPr>
+        <p:spPr/>
+        <p:txBody>
+          <a:bodyPr/>
+          <a:lstStyle/>
+          <a:p>
+            <a:endParaRPr lang="fr-FR" noProof="0" dirty="0"/>
+          </a:p>
+        </p:txBody>
+      </p:sp>
+      <p:sp>
+        <p:nvSpPr>
+          <p:cNvPr id="3" name="Content Placeholder 2">
+            <a:extLst>
+              <a:ext uri="{FF2B5EF4-FFF2-40B4-BE49-F238E27FC236}">
+                <a16:creationId xmlns:a16="http://schemas.microsoft.com/office/drawing/2014/main" id="{D9F5F88A-BC4F-3E1D-6D0A-49AB3149FA06}"/>
+              </a:ext>
+            </a:extLst>
+          </p:cNvPr>
+          <p:cNvSpPr>
+            <a:spLocks noGrp="1"/>
+          </p:cNvSpPr>
+          <p:nvPr>
+            <p:ph idx="1"/>
+          </p:nvPr>
+        </p:nvSpPr>
+        <p:spPr/>
+        <p:txBody>
+          <a:bodyPr/>
+          <a:lstStyle/>
+          <a:p>
+            <a:endParaRPr lang="fr-FR" noProof="0" dirty="0"/>
+          </a:p>
+        </p:txBody>
+      </p:sp>
+      <p:pic>
+        <p:nvPicPr>
+          <p:cNvPr id="8" name="Picture 7">
+            <a:extLst>
+              <a:ext uri="{FF2B5EF4-FFF2-40B4-BE49-F238E27FC236}">
+                <a16:creationId xmlns:a16="http://schemas.microsoft.com/office/drawing/2014/main" id="{6782D67D-E435-6555-9C8E-47C8347EB4BD}"/>
               </a:ext>
             </a:extLst>
           </p:cNvPr>
@@ -3576,6 +5916,116 @@
         </p:nvPicPr>
         <p:blipFill>
           <a:blip r:embed="rId2"/>
+          <a:stretch>
+            <a:fillRect/>
+          </a:stretch>
+        </p:blipFill>
+        <p:spPr>
+          <a:xfrm>
+            <a:off x="0" y="0"/>
+            <a:ext cx="12192000" cy="6858000"/>
+          </a:xfrm>
+          <a:prstGeom prst="rect">
+            <a:avLst/>
+          </a:prstGeom>
+        </p:spPr>
+      </p:pic>
+    </p:spTree>
+    <p:extLst>
+      <p:ext uri="{BB962C8B-B14F-4D97-AF65-F5344CB8AC3E}">
+        <p14:creationId xmlns:p14="http://schemas.microsoft.com/office/powerpoint/2010/main" val="377861202"/>
+      </p:ext>
+    </p:extLst>
+  </p:cSld>
+  <p:clrMapOvr>
+    <a:masterClrMapping/>
+  </p:clrMapOvr>
+</p:sld>
+</file>
+
+<file path=ppt/slides/slide6.xml><?xml version="1.0" encoding="utf-8"?>
+<p:sld xmlns:a="http://schemas.openxmlformats.org/drawingml/2006/main" xmlns:r="http://schemas.openxmlformats.org/officeDocument/2006/relationships" xmlns:p="http://schemas.openxmlformats.org/presentationml/2006/main">
+  <p:cSld>
+    <p:spTree>
+      <p:nvGrpSpPr>
+        <p:cNvPr id="1" name=""/>
+        <p:cNvGrpSpPr/>
+        <p:nvPr/>
+      </p:nvGrpSpPr>
+      <p:grpSpPr>
+        <a:xfrm>
+          <a:off x="0" y="0"/>
+          <a:ext cx="0" cy="0"/>
+          <a:chOff x="0" y="0"/>
+          <a:chExt cx="0" cy="0"/>
+        </a:xfrm>
+      </p:grpSpPr>
+      <p:sp>
+        <p:nvSpPr>
+          <p:cNvPr id="2" name="Title 1">
+            <a:extLst>
+              <a:ext uri="{FF2B5EF4-FFF2-40B4-BE49-F238E27FC236}">
+                <a16:creationId xmlns:a16="http://schemas.microsoft.com/office/drawing/2014/main" id="{9DDE3D56-5B6A-7237-AC05-39C4C57C79D7}"/>
+              </a:ext>
+            </a:extLst>
+          </p:cNvPr>
+          <p:cNvSpPr>
+            <a:spLocks noGrp="1"/>
+          </p:cNvSpPr>
+          <p:nvPr>
+            <p:ph type="title"/>
+          </p:nvPr>
+        </p:nvSpPr>
+        <p:spPr/>
+        <p:txBody>
+          <a:bodyPr/>
+          <a:lstStyle/>
+          <a:p>
+            <a:endParaRPr lang="fr-FR" noProof="0" dirty="0"/>
+          </a:p>
+        </p:txBody>
+      </p:sp>
+      <p:sp>
+        <p:nvSpPr>
+          <p:cNvPr id="3" name="Content Placeholder 2">
+            <a:extLst>
+              <a:ext uri="{FF2B5EF4-FFF2-40B4-BE49-F238E27FC236}">
+                <a16:creationId xmlns:a16="http://schemas.microsoft.com/office/drawing/2014/main" id="{AB1ACF22-C056-9CB7-A296-F73F7F2A26A0}"/>
+              </a:ext>
+            </a:extLst>
+          </p:cNvPr>
+          <p:cNvSpPr>
+            <a:spLocks noGrp="1"/>
+          </p:cNvSpPr>
+          <p:nvPr>
+            <p:ph idx="1"/>
+          </p:nvPr>
+        </p:nvSpPr>
+        <p:spPr/>
+        <p:txBody>
+          <a:bodyPr/>
+          <a:lstStyle/>
+          <a:p>
+            <a:endParaRPr lang="fr-FR" noProof="0" dirty="0"/>
+          </a:p>
+        </p:txBody>
+      </p:sp>
+      <p:pic>
+        <p:nvPicPr>
+          <p:cNvPr id="8" name="Picture 7">
+            <a:extLst>
+              <a:ext uri="{FF2B5EF4-FFF2-40B4-BE49-F238E27FC236}">
+                <a16:creationId xmlns:a16="http://schemas.microsoft.com/office/drawing/2014/main" id="{3B8DC352-288E-072A-0BEE-9D94382B4994}"/>
+              </a:ext>
+            </a:extLst>
+          </p:cNvPr>
+          <p:cNvPicPr>
+            <a:picLocks noChangeAspect="1"/>
+          </p:cNvPicPr>
+          <p:nvPr/>
+        </p:nvPicPr>
+        <p:blipFill>
+          <a:blip r:embed="rId3"/>
           <a:stretch>
             <a:fillRect/>
           </a:stretch>
@@ -3603,7 +6053,7 @@
 </p:sld>
 </file>
 
-<file path=ppt/slides/slide11.xml><?xml version="1.0" encoding="utf-8"?>
+<file path=ppt/slides/slide7.xml><?xml version="1.0" encoding="utf-8"?>
 <p:sld xmlns:a="http://schemas.openxmlformats.org/drawingml/2006/main" xmlns:r="http://schemas.openxmlformats.org/officeDocument/2006/relationships" xmlns:p="http://schemas.openxmlformats.org/presentationml/2006/main">
   <p:cSld>
     <p:spTree>
@@ -3625,7 +6075,7 @@
           <p:cNvPr id="2" name="Title 1">
             <a:extLst>
               <a:ext uri="{FF2B5EF4-FFF2-40B4-BE49-F238E27FC236}">
-                <a16:creationId xmlns:a16="http://schemas.microsoft.com/office/drawing/2014/main" id="{1AEB397C-74AA-1015-072B-D6059AE209AC}"/>
+                <a16:creationId xmlns:a16="http://schemas.microsoft.com/office/drawing/2014/main" id="{F21A1455-AF6E-1742-5AE1-506DD68CD1F2}"/>
               </a:ext>
             </a:extLst>
           </p:cNvPr>
@@ -3641,7 +6091,7 @@
           <a:bodyPr/>
           <a:lstStyle/>
           <a:p>
-            <a:endParaRPr lang="en-US"/>
+            <a:endParaRPr lang="fr-FR" noProof="0" dirty="0"/>
           </a:p>
         </p:txBody>
       </p:sp>
@@ -3650,7 +6100,7 @@
           <p:cNvPr id="3" name="Content Placeholder 2">
             <a:extLst>
               <a:ext uri="{FF2B5EF4-FFF2-40B4-BE49-F238E27FC236}">
-                <a16:creationId xmlns:a16="http://schemas.microsoft.com/office/drawing/2014/main" id="{3C0030F8-F843-B679-C218-50A50E505B23}"/>
+                <a16:creationId xmlns:a16="http://schemas.microsoft.com/office/drawing/2014/main" id="{40D662A1-857D-35E5-0E74-ACCA7378CF13}"/>
               </a:ext>
             </a:extLst>
           </p:cNvPr>
@@ -3666,16 +6116,17 @@
           <a:bodyPr/>
           <a:lstStyle/>
           <a:p>
-            <a:endParaRPr lang="en-US"/>
+            <a:endParaRPr lang="fr-FR" noProof="0" dirty="0"/>
           </a:p>
         </p:txBody>
       </p:sp>
       <p:pic>
         <p:nvPicPr>
           <p:cNvPr id="5" name="Picture 4">
-            <a:extLst>
-              <a:ext uri="{FF2B5EF4-FFF2-40B4-BE49-F238E27FC236}">
-                <a16:creationId xmlns:a16="http://schemas.microsoft.com/office/drawing/2014/main" id="{230F5D8C-1AE5-DBAB-FED2-CD4685BB0F51}"/>
+            <a:hlinkClick r:id="rId3"/>
+            <a:extLst>
+              <a:ext uri="{FF2B5EF4-FFF2-40B4-BE49-F238E27FC236}">
+                <a16:creationId xmlns:a16="http://schemas.microsoft.com/office/drawing/2014/main" id="{44D5D41B-A219-BBB5-817D-9A03348C0DC5}"/>
               </a:ext>
             </a:extLst>
           </p:cNvPr>
@@ -3685,7 +6136,7 @@
           <p:nvPr/>
         </p:nvPicPr>
         <p:blipFill>
-          <a:blip r:embed="rId2"/>
+          <a:blip r:embed="rId4"/>
           <a:stretch>
             <a:fillRect/>
           </a:stretch>
@@ -3703,1657 +6154,7 @@
     </p:spTree>
     <p:extLst>
       <p:ext uri="{BB962C8B-B14F-4D97-AF65-F5344CB8AC3E}">
-        <p14:creationId xmlns:p14="http://schemas.microsoft.com/office/powerpoint/2010/main" val="4278129628"/>
-      </p:ext>
-    </p:extLst>
-  </p:cSld>
-  <p:clrMapOvr>
-    <a:masterClrMapping/>
-  </p:clrMapOvr>
-</p:sld>
-</file>
-
-<file path=ppt/slides/slide12.xml><?xml version="1.0" encoding="utf-8"?>
-<p:sld xmlns:a="http://schemas.openxmlformats.org/drawingml/2006/main" xmlns:r="http://schemas.openxmlformats.org/officeDocument/2006/relationships" xmlns:p="http://schemas.openxmlformats.org/presentationml/2006/main">
-  <p:cSld>
-    <p:spTree>
-      <p:nvGrpSpPr>
-        <p:cNvPr id="1" name=""/>
-        <p:cNvGrpSpPr/>
-        <p:nvPr/>
-      </p:nvGrpSpPr>
-      <p:grpSpPr>
-        <a:xfrm>
-          <a:off x="0" y="0"/>
-          <a:ext cx="0" cy="0"/>
-          <a:chOff x="0" y="0"/>
-          <a:chExt cx="0" cy="0"/>
-        </a:xfrm>
-      </p:grpSpPr>
-      <p:sp>
-        <p:nvSpPr>
-          <p:cNvPr id="2" name="Title 1">
-            <a:extLst>
-              <a:ext uri="{FF2B5EF4-FFF2-40B4-BE49-F238E27FC236}">
-                <a16:creationId xmlns:a16="http://schemas.microsoft.com/office/drawing/2014/main" id="{6FF9BC5D-392F-82E3-349F-5788567CEEEA}"/>
-              </a:ext>
-            </a:extLst>
-          </p:cNvPr>
-          <p:cNvSpPr>
-            <a:spLocks noGrp="1"/>
-          </p:cNvSpPr>
-          <p:nvPr>
-            <p:ph type="title"/>
-          </p:nvPr>
-        </p:nvSpPr>
-        <p:spPr/>
-        <p:txBody>
-          <a:bodyPr/>
-          <a:lstStyle/>
-          <a:p>
-            <a:endParaRPr lang="en-US"/>
-          </a:p>
-        </p:txBody>
-      </p:sp>
-      <p:sp>
-        <p:nvSpPr>
-          <p:cNvPr id="3" name="Content Placeholder 2">
-            <a:extLst>
-              <a:ext uri="{FF2B5EF4-FFF2-40B4-BE49-F238E27FC236}">
-                <a16:creationId xmlns:a16="http://schemas.microsoft.com/office/drawing/2014/main" id="{7DC28CA0-B7E4-FF53-DD52-D3DF1820B407}"/>
-              </a:ext>
-            </a:extLst>
-          </p:cNvPr>
-          <p:cNvSpPr>
-            <a:spLocks noGrp="1"/>
-          </p:cNvSpPr>
-          <p:nvPr>
-            <p:ph idx="1"/>
-          </p:nvPr>
-        </p:nvSpPr>
-        <p:spPr/>
-        <p:txBody>
-          <a:bodyPr/>
-          <a:lstStyle/>
-          <a:p>
-            <a:endParaRPr lang="en-US"/>
-          </a:p>
-        </p:txBody>
-      </p:sp>
-      <p:pic>
-        <p:nvPicPr>
-          <p:cNvPr id="5" name="Picture 4">
-            <a:extLst>
-              <a:ext uri="{FF2B5EF4-FFF2-40B4-BE49-F238E27FC236}">
-                <a16:creationId xmlns:a16="http://schemas.microsoft.com/office/drawing/2014/main" id="{FE45E588-8A64-31C6-5167-C60408701F8E}"/>
-              </a:ext>
-            </a:extLst>
-          </p:cNvPr>
-          <p:cNvPicPr>
-            <a:picLocks noChangeAspect="1"/>
-          </p:cNvPicPr>
-          <p:nvPr/>
-        </p:nvPicPr>
-        <p:blipFill>
-          <a:blip r:embed="rId2"/>
-          <a:stretch>
-            <a:fillRect/>
-          </a:stretch>
-        </p:blipFill>
-        <p:spPr>
-          <a:xfrm>
-            <a:off x="0" y="0"/>
-            <a:ext cx="12192000" cy="6858000"/>
-          </a:xfrm>
-          <a:prstGeom prst="rect">
-            <a:avLst/>
-          </a:prstGeom>
-        </p:spPr>
-      </p:pic>
-    </p:spTree>
-    <p:extLst>
-      <p:ext uri="{BB962C8B-B14F-4D97-AF65-F5344CB8AC3E}">
-        <p14:creationId xmlns:p14="http://schemas.microsoft.com/office/powerpoint/2010/main" val="698483251"/>
-      </p:ext>
-    </p:extLst>
-  </p:cSld>
-  <p:clrMapOvr>
-    <a:masterClrMapping/>
-  </p:clrMapOvr>
-</p:sld>
-</file>
-
-<file path=ppt/slides/slide13.xml><?xml version="1.0" encoding="utf-8"?>
-<p:sld xmlns:a="http://schemas.openxmlformats.org/drawingml/2006/main" xmlns:r="http://schemas.openxmlformats.org/officeDocument/2006/relationships" xmlns:p="http://schemas.openxmlformats.org/presentationml/2006/main">
-  <p:cSld>
-    <p:spTree>
-      <p:nvGrpSpPr>
-        <p:cNvPr id="1" name=""/>
-        <p:cNvGrpSpPr/>
-        <p:nvPr/>
-      </p:nvGrpSpPr>
-      <p:grpSpPr>
-        <a:xfrm>
-          <a:off x="0" y="0"/>
-          <a:ext cx="0" cy="0"/>
-          <a:chOff x="0" y="0"/>
-          <a:chExt cx="0" cy="0"/>
-        </a:xfrm>
-      </p:grpSpPr>
-      <p:sp>
-        <p:nvSpPr>
-          <p:cNvPr id="2" name="Title 1">
-            <a:extLst>
-              <a:ext uri="{FF2B5EF4-FFF2-40B4-BE49-F238E27FC236}">
-                <a16:creationId xmlns:a16="http://schemas.microsoft.com/office/drawing/2014/main" id="{CE793662-B77E-F121-16B4-744A61372D59}"/>
-              </a:ext>
-            </a:extLst>
-          </p:cNvPr>
-          <p:cNvSpPr>
-            <a:spLocks noGrp="1"/>
-          </p:cNvSpPr>
-          <p:nvPr>
-            <p:ph type="title"/>
-          </p:nvPr>
-        </p:nvSpPr>
-        <p:spPr/>
-        <p:txBody>
-          <a:bodyPr/>
-          <a:lstStyle/>
-          <a:p>
-            <a:endParaRPr lang="en-US"/>
-          </a:p>
-        </p:txBody>
-      </p:sp>
-      <p:sp>
-        <p:nvSpPr>
-          <p:cNvPr id="3" name="Content Placeholder 2">
-            <a:extLst>
-              <a:ext uri="{FF2B5EF4-FFF2-40B4-BE49-F238E27FC236}">
-                <a16:creationId xmlns:a16="http://schemas.microsoft.com/office/drawing/2014/main" id="{AC5A2C1A-A6E8-8936-6D76-3B81C088BC8C}"/>
-              </a:ext>
-            </a:extLst>
-          </p:cNvPr>
-          <p:cNvSpPr>
-            <a:spLocks noGrp="1"/>
-          </p:cNvSpPr>
-          <p:nvPr>
-            <p:ph idx="1"/>
-          </p:nvPr>
-        </p:nvSpPr>
-        <p:spPr/>
-        <p:txBody>
-          <a:bodyPr/>
-          <a:lstStyle/>
-          <a:p>
-            <a:endParaRPr lang="en-US"/>
-          </a:p>
-        </p:txBody>
-      </p:sp>
-      <p:pic>
-        <p:nvPicPr>
-          <p:cNvPr id="5" name="Picture 4">
-            <a:extLst>
-              <a:ext uri="{FF2B5EF4-FFF2-40B4-BE49-F238E27FC236}">
-                <a16:creationId xmlns:a16="http://schemas.microsoft.com/office/drawing/2014/main" id="{9BFFE6B2-15F3-A943-2087-EFE05A02DF77}"/>
-              </a:ext>
-            </a:extLst>
-          </p:cNvPr>
-          <p:cNvPicPr>
-            <a:picLocks noChangeAspect="1"/>
-          </p:cNvPicPr>
-          <p:nvPr/>
-        </p:nvPicPr>
-        <p:blipFill>
-          <a:blip r:embed="rId2"/>
-          <a:stretch>
-            <a:fillRect/>
-          </a:stretch>
-        </p:blipFill>
-        <p:spPr>
-          <a:xfrm>
-            <a:off x="0" y="0"/>
-            <a:ext cx="12192000" cy="6858000"/>
-          </a:xfrm>
-          <a:prstGeom prst="rect">
-            <a:avLst/>
-          </a:prstGeom>
-        </p:spPr>
-      </p:pic>
-    </p:spTree>
-    <p:extLst>
-      <p:ext uri="{BB962C8B-B14F-4D97-AF65-F5344CB8AC3E}">
-        <p14:creationId xmlns:p14="http://schemas.microsoft.com/office/powerpoint/2010/main" val="3931046656"/>
-      </p:ext>
-    </p:extLst>
-  </p:cSld>
-  <p:clrMapOvr>
-    <a:masterClrMapping/>
-  </p:clrMapOvr>
-</p:sld>
-</file>
-
-<file path=ppt/slides/slide14.xml><?xml version="1.0" encoding="utf-8"?>
-<p:sld xmlns:a="http://schemas.openxmlformats.org/drawingml/2006/main" xmlns:r="http://schemas.openxmlformats.org/officeDocument/2006/relationships" xmlns:p="http://schemas.openxmlformats.org/presentationml/2006/main">
-  <p:cSld>
-    <p:spTree>
-      <p:nvGrpSpPr>
-        <p:cNvPr id="1" name=""/>
-        <p:cNvGrpSpPr/>
-        <p:nvPr/>
-      </p:nvGrpSpPr>
-      <p:grpSpPr>
-        <a:xfrm>
-          <a:off x="0" y="0"/>
-          <a:ext cx="0" cy="0"/>
-          <a:chOff x="0" y="0"/>
-          <a:chExt cx="0" cy="0"/>
-        </a:xfrm>
-      </p:grpSpPr>
-      <p:sp>
-        <p:nvSpPr>
-          <p:cNvPr id="2" name="Title 1">
-            <a:extLst>
-              <a:ext uri="{FF2B5EF4-FFF2-40B4-BE49-F238E27FC236}">
-                <a16:creationId xmlns:a16="http://schemas.microsoft.com/office/drawing/2014/main" id="{44CDDFAA-4153-34FB-F62B-A40B7DC20135}"/>
-              </a:ext>
-            </a:extLst>
-          </p:cNvPr>
-          <p:cNvSpPr>
-            <a:spLocks noGrp="1"/>
-          </p:cNvSpPr>
-          <p:nvPr>
-            <p:ph type="title"/>
-          </p:nvPr>
-        </p:nvSpPr>
-        <p:spPr/>
-        <p:txBody>
-          <a:bodyPr/>
-          <a:lstStyle/>
-          <a:p>
-            <a:endParaRPr lang="en-US"/>
-          </a:p>
-        </p:txBody>
-      </p:sp>
-      <p:sp>
-        <p:nvSpPr>
-          <p:cNvPr id="3" name="Content Placeholder 2">
-            <a:extLst>
-              <a:ext uri="{FF2B5EF4-FFF2-40B4-BE49-F238E27FC236}">
-                <a16:creationId xmlns:a16="http://schemas.microsoft.com/office/drawing/2014/main" id="{7621B9C3-7F43-05D2-C471-106330E74198}"/>
-              </a:ext>
-            </a:extLst>
-          </p:cNvPr>
-          <p:cNvSpPr>
-            <a:spLocks noGrp="1"/>
-          </p:cNvSpPr>
-          <p:nvPr>
-            <p:ph idx="1"/>
-          </p:nvPr>
-        </p:nvSpPr>
-        <p:spPr/>
-        <p:txBody>
-          <a:bodyPr/>
-          <a:lstStyle/>
-          <a:p>
-            <a:endParaRPr lang="en-US"/>
-          </a:p>
-        </p:txBody>
-      </p:sp>
-      <p:pic>
-        <p:nvPicPr>
-          <p:cNvPr id="5" name="Picture 4">
-            <a:extLst>
-              <a:ext uri="{FF2B5EF4-FFF2-40B4-BE49-F238E27FC236}">
-                <a16:creationId xmlns:a16="http://schemas.microsoft.com/office/drawing/2014/main" id="{CA2B7ECF-E3FF-C200-B39E-24CE65C72335}"/>
-              </a:ext>
-            </a:extLst>
-          </p:cNvPr>
-          <p:cNvPicPr>
-            <a:picLocks noChangeAspect="1"/>
-          </p:cNvPicPr>
-          <p:nvPr/>
-        </p:nvPicPr>
-        <p:blipFill>
-          <a:blip r:embed="rId2"/>
-          <a:stretch>
-            <a:fillRect/>
-          </a:stretch>
-        </p:blipFill>
-        <p:spPr>
-          <a:xfrm>
-            <a:off x="0" y="0"/>
-            <a:ext cx="12192000" cy="6858000"/>
-          </a:xfrm>
-          <a:prstGeom prst="rect">
-            <a:avLst/>
-          </a:prstGeom>
-        </p:spPr>
-      </p:pic>
-    </p:spTree>
-    <p:extLst>
-      <p:ext uri="{BB962C8B-B14F-4D97-AF65-F5344CB8AC3E}">
-        <p14:creationId xmlns:p14="http://schemas.microsoft.com/office/powerpoint/2010/main" val="968629532"/>
-      </p:ext>
-    </p:extLst>
-  </p:cSld>
-  <p:clrMapOvr>
-    <a:masterClrMapping/>
-  </p:clrMapOvr>
-</p:sld>
-</file>
-
-<file path=ppt/slides/slide15.xml><?xml version="1.0" encoding="utf-8"?>
-<p:sld xmlns:a="http://schemas.openxmlformats.org/drawingml/2006/main" xmlns:r="http://schemas.openxmlformats.org/officeDocument/2006/relationships" xmlns:p="http://schemas.openxmlformats.org/presentationml/2006/main">
-  <p:cSld>
-    <p:spTree>
-      <p:nvGrpSpPr>
-        <p:cNvPr id="1" name=""/>
-        <p:cNvGrpSpPr/>
-        <p:nvPr/>
-      </p:nvGrpSpPr>
-      <p:grpSpPr>
-        <a:xfrm>
-          <a:off x="0" y="0"/>
-          <a:ext cx="0" cy="0"/>
-          <a:chOff x="0" y="0"/>
-          <a:chExt cx="0" cy="0"/>
-        </a:xfrm>
-      </p:grpSpPr>
-      <p:sp>
-        <p:nvSpPr>
-          <p:cNvPr id="2" name="Title 1">
-            <a:extLst>
-              <a:ext uri="{FF2B5EF4-FFF2-40B4-BE49-F238E27FC236}">
-                <a16:creationId xmlns:a16="http://schemas.microsoft.com/office/drawing/2014/main" id="{84960480-6D82-1C43-DAE4-050EBE13814E}"/>
-              </a:ext>
-            </a:extLst>
-          </p:cNvPr>
-          <p:cNvSpPr>
-            <a:spLocks noGrp="1"/>
-          </p:cNvSpPr>
-          <p:nvPr>
-            <p:ph type="title"/>
-          </p:nvPr>
-        </p:nvSpPr>
-        <p:spPr/>
-        <p:txBody>
-          <a:bodyPr/>
-          <a:lstStyle/>
-          <a:p>
-            <a:endParaRPr lang="en-US"/>
-          </a:p>
-        </p:txBody>
-      </p:sp>
-      <p:sp>
-        <p:nvSpPr>
-          <p:cNvPr id="3" name="Content Placeholder 2">
-            <a:extLst>
-              <a:ext uri="{FF2B5EF4-FFF2-40B4-BE49-F238E27FC236}">
-                <a16:creationId xmlns:a16="http://schemas.microsoft.com/office/drawing/2014/main" id="{A09E082B-5329-4BDA-B38B-FD13D4A8C6F3}"/>
-              </a:ext>
-            </a:extLst>
-          </p:cNvPr>
-          <p:cNvSpPr>
-            <a:spLocks noGrp="1"/>
-          </p:cNvSpPr>
-          <p:nvPr>
-            <p:ph idx="1"/>
-          </p:nvPr>
-        </p:nvSpPr>
-        <p:spPr/>
-        <p:txBody>
-          <a:bodyPr/>
-          <a:lstStyle/>
-          <a:p>
-            <a:endParaRPr lang="en-US"/>
-          </a:p>
-        </p:txBody>
-      </p:sp>
-      <p:pic>
-        <p:nvPicPr>
-          <p:cNvPr id="5" name="Picture 4">
-            <a:extLst>
-              <a:ext uri="{FF2B5EF4-FFF2-40B4-BE49-F238E27FC236}">
-                <a16:creationId xmlns:a16="http://schemas.microsoft.com/office/drawing/2014/main" id="{EAD4C239-53C0-1A8E-741B-D50E5EF6BC5B}"/>
-              </a:ext>
-            </a:extLst>
-          </p:cNvPr>
-          <p:cNvPicPr>
-            <a:picLocks noChangeAspect="1"/>
-          </p:cNvPicPr>
-          <p:nvPr/>
-        </p:nvPicPr>
-        <p:blipFill>
-          <a:blip r:embed="rId2"/>
-          <a:stretch>
-            <a:fillRect/>
-          </a:stretch>
-        </p:blipFill>
-        <p:spPr>
-          <a:xfrm>
-            <a:off x="0" y="0"/>
-            <a:ext cx="12192000" cy="6858000"/>
-          </a:xfrm>
-          <a:prstGeom prst="rect">
-            <a:avLst/>
-          </a:prstGeom>
-        </p:spPr>
-      </p:pic>
-    </p:spTree>
-    <p:extLst>
-      <p:ext uri="{BB962C8B-B14F-4D97-AF65-F5344CB8AC3E}">
-        <p14:creationId xmlns:p14="http://schemas.microsoft.com/office/powerpoint/2010/main" val="2360188842"/>
-      </p:ext>
-    </p:extLst>
-  </p:cSld>
-  <p:clrMapOvr>
-    <a:masterClrMapping/>
-  </p:clrMapOvr>
-</p:sld>
-</file>
-
-<file path=ppt/slides/slide16.xml><?xml version="1.0" encoding="utf-8"?>
-<p:sld xmlns:a="http://schemas.openxmlformats.org/drawingml/2006/main" xmlns:r="http://schemas.openxmlformats.org/officeDocument/2006/relationships" xmlns:p="http://schemas.openxmlformats.org/presentationml/2006/main">
-  <p:cSld>
-    <p:spTree>
-      <p:nvGrpSpPr>
-        <p:cNvPr id="1" name=""/>
-        <p:cNvGrpSpPr/>
-        <p:nvPr/>
-      </p:nvGrpSpPr>
-      <p:grpSpPr>
-        <a:xfrm>
-          <a:off x="0" y="0"/>
-          <a:ext cx="0" cy="0"/>
-          <a:chOff x="0" y="0"/>
-          <a:chExt cx="0" cy="0"/>
-        </a:xfrm>
-      </p:grpSpPr>
-      <p:sp>
-        <p:nvSpPr>
-          <p:cNvPr id="2" name="Title 1">
-            <a:extLst>
-              <a:ext uri="{FF2B5EF4-FFF2-40B4-BE49-F238E27FC236}">
-                <a16:creationId xmlns:a16="http://schemas.microsoft.com/office/drawing/2014/main" id="{427F3C2A-B5FA-0202-540B-96F8FDB71298}"/>
-              </a:ext>
-            </a:extLst>
-          </p:cNvPr>
-          <p:cNvSpPr>
-            <a:spLocks noGrp="1"/>
-          </p:cNvSpPr>
-          <p:nvPr>
-            <p:ph type="title"/>
-          </p:nvPr>
-        </p:nvSpPr>
-        <p:spPr/>
-        <p:txBody>
-          <a:bodyPr/>
-          <a:lstStyle/>
-          <a:p>
-            <a:endParaRPr lang="en-US"/>
-          </a:p>
-        </p:txBody>
-      </p:sp>
-      <p:sp>
-        <p:nvSpPr>
-          <p:cNvPr id="3" name="Content Placeholder 2">
-            <a:extLst>
-              <a:ext uri="{FF2B5EF4-FFF2-40B4-BE49-F238E27FC236}">
-                <a16:creationId xmlns:a16="http://schemas.microsoft.com/office/drawing/2014/main" id="{8211FFAC-C754-B063-414F-77A2B1E87985}"/>
-              </a:ext>
-            </a:extLst>
-          </p:cNvPr>
-          <p:cNvSpPr>
-            <a:spLocks noGrp="1"/>
-          </p:cNvSpPr>
-          <p:nvPr>
-            <p:ph idx="1"/>
-          </p:nvPr>
-        </p:nvSpPr>
-        <p:spPr/>
-        <p:txBody>
-          <a:bodyPr/>
-          <a:lstStyle/>
-          <a:p>
-            <a:endParaRPr lang="en-US"/>
-          </a:p>
-        </p:txBody>
-      </p:sp>
-      <p:pic>
-        <p:nvPicPr>
-          <p:cNvPr id="5" name="Picture 4">
-            <a:extLst>
-              <a:ext uri="{FF2B5EF4-FFF2-40B4-BE49-F238E27FC236}">
-                <a16:creationId xmlns:a16="http://schemas.microsoft.com/office/drawing/2014/main" id="{6B05E9A9-CB4B-7A26-D161-0AF9674D26A4}"/>
-              </a:ext>
-            </a:extLst>
-          </p:cNvPr>
-          <p:cNvPicPr>
-            <a:picLocks noChangeAspect="1"/>
-          </p:cNvPicPr>
-          <p:nvPr/>
-        </p:nvPicPr>
-        <p:blipFill>
-          <a:blip r:embed="rId2"/>
-          <a:stretch>
-            <a:fillRect/>
-          </a:stretch>
-        </p:blipFill>
-        <p:spPr>
-          <a:xfrm>
-            <a:off x="0" y="0"/>
-            <a:ext cx="12192000" cy="6858000"/>
-          </a:xfrm>
-          <a:prstGeom prst="rect">
-            <a:avLst/>
-          </a:prstGeom>
-        </p:spPr>
-      </p:pic>
-    </p:spTree>
-    <p:extLst>
-      <p:ext uri="{BB962C8B-B14F-4D97-AF65-F5344CB8AC3E}">
-        <p14:creationId xmlns:p14="http://schemas.microsoft.com/office/powerpoint/2010/main" val="1089341589"/>
-      </p:ext>
-    </p:extLst>
-  </p:cSld>
-  <p:clrMapOvr>
-    <a:masterClrMapping/>
-  </p:clrMapOvr>
-</p:sld>
-</file>
-
-<file path=ppt/slides/slide17.xml><?xml version="1.0" encoding="utf-8"?>
-<p:sld xmlns:a="http://schemas.openxmlformats.org/drawingml/2006/main" xmlns:r="http://schemas.openxmlformats.org/officeDocument/2006/relationships" xmlns:p="http://schemas.openxmlformats.org/presentationml/2006/main">
-  <p:cSld>
-    <p:spTree>
-      <p:nvGrpSpPr>
-        <p:cNvPr id="1" name=""/>
-        <p:cNvGrpSpPr/>
-        <p:nvPr/>
-      </p:nvGrpSpPr>
-      <p:grpSpPr>
-        <a:xfrm>
-          <a:off x="0" y="0"/>
-          <a:ext cx="0" cy="0"/>
-          <a:chOff x="0" y="0"/>
-          <a:chExt cx="0" cy="0"/>
-        </a:xfrm>
-      </p:grpSpPr>
-      <p:sp>
-        <p:nvSpPr>
-          <p:cNvPr id="2" name="Title 1">
-            <a:extLst>
-              <a:ext uri="{FF2B5EF4-FFF2-40B4-BE49-F238E27FC236}">
-                <a16:creationId xmlns:a16="http://schemas.microsoft.com/office/drawing/2014/main" id="{1425B189-7BBE-3897-1EA4-AB41FCFCBF8D}"/>
-              </a:ext>
-            </a:extLst>
-          </p:cNvPr>
-          <p:cNvSpPr>
-            <a:spLocks noGrp="1"/>
-          </p:cNvSpPr>
-          <p:nvPr>
-            <p:ph type="title"/>
-          </p:nvPr>
-        </p:nvSpPr>
-        <p:spPr/>
-        <p:txBody>
-          <a:bodyPr/>
-          <a:lstStyle/>
-          <a:p>
-            <a:endParaRPr lang="en-US"/>
-          </a:p>
-        </p:txBody>
-      </p:sp>
-      <p:sp>
-        <p:nvSpPr>
-          <p:cNvPr id="3" name="Content Placeholder 2">
-            <a:extLst>
-              <a:ext uri="{FF2B5EF4-FFF2-40B4-BE49-F238E27FC236}">
-                <a16:creationId xmlns:a16="http://schemas.microsoft.com/office/drawing/2014/main" id="{449072C4-908A-EF18-FEA3-A9AF14290662}"/>
-              </a:ext>
-            </a:extLst>
-          </p:cNvPr>
-          <p:cNvSpPr>
-            <a:spLocks noGrp="1"/>
-          </p:cNvSpPr>
-          <p:nvPr>
-            <p:ph idx="1"/>
-          </p:nvPr>
-        </p:nvSpPr>
-        <p:spPr/>
-        <p:txBody>
-          <a:bodyPr/>
-          <a:lstStyle/>
-          <a:p>
-            <a:endParaRPr lang="en-US"/>
-          </a:p>
-        </p:txBody>
-      </p:sp>
-      <p:pic>
-        <p:nvPicPr>
-          <p:cNvPr id="5" name="Picture 4">
-            <a:extLst>
-              <a:ext uri="{FF2B5EF4-FFF2-40B4-BE49-F238E27FC236}">
-                <a16:creationId xmlns:a16="http://schemas.microsoft.com/office/drawing/2014/main" id="{8606C7F3-D9F5-D510-C741-C6D2EFA87462}"/>
-              </a:ext>
-            </a:extLst>
-          </p:cNvPr>
-          <p:cNvPicPr>
-            <a:picLocks noChangeAspect="1"/>
-          </p:cNvPicPr>
-          <p:nvPr/>
-        </p:nvPicPr>
-        <p:blipFill>
-          <a:blip r:embed="rId2"/>
-          <a:stretch>
-            <a:fillRect/>
-          </a:stretch>
-        </p:blipFill>
-        <p:spPr>
-          <a:xfrm>
-            <a:off x="0" y="0"/>
-            <a:ext cx="12192000" cy="6858000"/>
-          </a:xfrm>
-          <a:prstGeom prst="rect">
-            <a:avLst/>
-          </a:prstGeom>
-        </p:spPr>
-      </p:pic>
-    </p:spTree>
-    <p:extLst>
-      <p:ext uri="{BB962C8B-B14F-4D97-AF65-F5344CB8AC3E}">
-        <p14:creationId xmlns:p14="http://schemas.microsoft.com/office/powerpoint/2010/main" val="1332139109"/>
-      </p:ext>
-    </p:extLst>
-  </p:cSld>
-  <p:clrMapOvr>
-    <a:masterClrMapping/>
-  </p:clrMapOvr>
-</p:sld>
-</file>
-
-<file path=ppt/slides/slide18.xml><?xml version="1.0" encoding="utf-8"?>
-<p:sld xmlns:a="http://schemas.openxmlformats.org/drawingml/2006/main" xmlns:r="http://schemas.openxmlformats.org/officeDocument/2006/relationships" xmlns:p="http://schemas.openxmlformats.org/presentationml/2006/main">
-  <p:cSld>
-    <p:spTree>
-      <p:nvGrpSpPr>
-        <p:cNvPr id="1" name=""/>
-        <p:cNvGrpSpPr/>
-        <p:nvPr/>
-      </p:nvGrpSpPr>
-      <p:grpSpPr>
-        <a:xfrm>
-          <a:off x="0" y="0"/>
-          <a:ext cx="0" cy="0"/>
-          <a:chOff x="0" y="0"/>
-          <a:chExt cx="0" cy="0"/>
-        </a:xfrm>
-      </p:grpSpPr>
-      <p:sp>
-        <p:nvSpPr>
-          <p:cNvPr id="2" name="Title 1">
-            <a:extLst>
-              <a:ext uri="{FF2B5EF4-FFF2-40B4-BE49-F238E27FC236}">
-                <a16:creationId xmlns:a16="http://schemas.microsoft.com/office/drawing/2014/main" id="{45F57AD9-C801-7ADB-2800-E644717B88F6}"/>
-              </a:ext>
-            </a:extLst>
-          </p:cNvPr>
-          <p:cNvSpPr>
-            <a:spLocks noGrp="1"/>
-          </p:cNvSpPr>
-          <p:nvPr>
-            <p:ph type="title"/>
-          </p:nvPr>
-        </p:nvSpPr>
-        <p:spPr/>
-        <p:txBody>
-          <a:bodyPr/>
-          <a:lstStyle/>
-          <a:p>
-            <a:endParaRPr lang="en-US"/>
-          </a:p>
-        </p:txBody>
-      </p:sp>
-      <p:sp>
-        <p:nvSpPr>
-          <p:cNvPr id="3" name="Content Placeholder 2">
-            <a:extLst>
-              <a:ext uri="{FF2B5EF4-FFF2-40B4-BE49-F238E27FC236}">
-                <a16:creationId xmlns:a16="http://schemas.microsoft.com/office/drawing/2014/main" id="{B35F7D9A-119A-44C0-5138-9EFA7A165439}"/>
-              </a:ext>
-            </a:extLst>
-          </p:cNvPr>
-          <p:cNvSpPr>
-            <a:spLocks noGrp="1"/>
-          </p:cNvSpPr>
-          <p:nvPr>
-            <p:ph idx="1"/>
-          </p:nvPr>
-        </p:nvSpPr>
-        <p:spPr/>
-        <p:txBody>
-          <a:bodyPr/>
-          <a:lstStyle/>
-          <a:p>
-            <a:endParaRPr lang="en-US"/>
-          </a:p>
-        </p:txBody>
-      </p:sp>
-      <p:pic>
-        <p:nvPicPr>
-          <p:cNvPr id="5" name="Picture 4">
-            <a:extLst>
-              <a:ext uri="{FF2B5EF4-FFF2-40B4-BE49-F238E27FC236}">
-                <a16:creationId xmlns:a16="http://schemas.microsoft.com/office/drawing/2014/main" id="{42ED63A9-56B0-8921-4EE2-EC57D2C8FEF1}"/>
-              </a:ext>
-            </a:extLst>
-          </p:cNvPr>
-          <p:cNvPicPr>
-            <a:picLocks noChangeAspect="1"/>
-          </p:cNvPicPr>
-          <p:nvPr/>
-        </p:nvPicPr>
-        <p:blipFill>
-          <a:blip r:embed="rId2"/>
-          <a:stretch>
-            <a:fillRect/>
-          </a:stretch>
-        </p:blipFill>
-        <p:spPr>
-          <a:xfrm>
-            <a:off x="0" y="0"/>
-            <a:ext cx="12192000" cy="6858000"/>
-          </a:xfrm>
-          <a:prstGeom prst="rect">
-            <a:avLst/>
-          </a:prstGeom>
-        </p:spPr>
-      </p:pic>
-    </p:spTree>
-    <p:extLst>
-      <p:ext uri="{BB962C8B-B14F-4D97-AF65-F5344CB8AC3E}">
-        <p14:creationId xmlns:p14="http://schemas.microsoft.com/office/powerpoint/2010/main" val="2610391264"/>
-      </p:ext>
-    </p:extLst>
-  </p:cSld>
-  <p:clrMapOvr>
-    <a:masterClrMapping/>
-  </p:clrMapOvr>
-</p:sld>
-</file>
-
-<file path=ppt/slides/slide19.xml><?xml version="1.0" encoding="utf-8"?>
-<p:sld xmlns:a="http://schemas.openxmlformats.org/drawingml/2006/main" xmlns:r="http://schemas.openxmlformats.org/officeDocument/2006/relationships" xmlns:p="http://schemas.openxmlformats.org/presentationml/2006/main">
-  <p:cSld>
-    <p:spTree>
-      <p:nvGrpSpPr>
-        <p:cNvPr id="1" name=""/>
-        <p:cNvGrpSpPr/>
-        <p:nvPr/>
-      </p:nvGrpSpPr>
-      <p:grpSpPr>
-        <a:xfrm>
-          <a:off x="0" y="0"/>
-          <a:ext cx="0" cy="0"/>
-          <a:chOff x="0" y="0"/>
-          <a:chExt cx="0" cy="0"/>
-        </a:xfrm>
-      </p:grpSpPr>
-      <p:sp>
-        <p:nvSpPr>
-          <p:cNvPr id="2" name="Title 1">
-            <a:extLst>
-              <a:ext uri="{FF2B5EF4-FFF2-40B4-BE49-F238E27FC236}">
-                <a16:creationId xmlns:a16="http://schemas.microsoft.com/office/drawing/2014/main" id="{CAAA9584-BF8F-EE69-BC9B-3CDE99A55376}"/>
-              </a:ext>
-            </a:extLst>
-          </p:cNvPr>
-          <p:cNvSpPr>
-            <a:spLocks noGrp="1"/>
-          </p:cNvSpPr>
-          <p:nvPr>
-            <p:ph type="ctrTitle"/>
-          </p:nvPr>
-        </p:nvSpPr>
-        <p:spPr/>
-        <p:txBody>
-          <a:bodyPr/>
-          <a:lstStyle/>
-          <a:p>
-            <a:endParaRPr lang="en-US"/>
-          </a:p>
-        </p:txBody>
-      </p:sp>
-      <p:sp>
-        <p:nvSpPr>
-          <p:cNvPr id="3" name="Subtitle 2">
-            <a:extLst>
-              <a:ext uri="{FF2B5EF4-FFF2-40B4-BE49-F238E27FC236}">
-                <a16:creationId xmlns:a16="http://schemas.microsoft.com/office/drawing/2014/main" id="{29CE8F0E-2AD6-89D7-0ED6-4378BDFFDA59}"/>
-              </a:ext>
-            </a:extLst>
-          </p:cNvPr>
-          <p:cNvSpPr>
-            <a:spLocks noGrp="1"/>
-          </p:cNvSpPr>
-          <p:nvPr>
-            <p:ph type="subTitle" idx="1"/>
-          </p:nvPr>
-        </p:nvSpPr>
-        <p:spPr/>
-        <p:txBody>
-          <a:bodyPr/>
-          <a:lstStyle/>
-          <a:p>
-            <a:endParaRPr lang="en-US"/>
-          </a:p>
-        </p:txBody>
-      </p:sp>
-      <p:pic>
-        <p:nvPicPr>
-          <p:cNvPr id="5" name="Picture 4">
-            <a:extLst>
-              <a:ext uri="{FF2B5EF4-FFF2-40B4-BE49-F238E27FC236}">
-                <a16:creationId xmlns:a16="http://schemas.microsoft.com/office/drawing/2014/main" id="{E17DA9CB-330C-3E5F-40AC-79CB71C2679B}"/>
-              </a:ext>
-            </a:extLst>
-          </p:cNvPr>
-          <p:cNvPicPr>
-            <a:picLocks noChangeAspect="1"/>
-          </p:cNvPicPr>
-          <p:nvPr/>
-        </p:nvPicPr>
-        <p:blipFill>
-          <a:blip r:embed="rId2"/>
-          <a:stretch>
-            <a:fillRect/>
-          </a:stretch>
-        </p:blipFill>
-        <p:spPr>
-          <a:xfrm>
-            <a:off x="0" y="0"/>
-            <a:ext cx="12192000" cy="6858000"/>
-          </a:xfrm>
-          <a:prstGeom prst="rect">
-            <a:avLst/>
-          </a:prstGeom>
-        </p:spPr>
-      </p:pic>
-    </p:spTree>
-    <p:extLst>
-      <p:ext uri="{BB962C8B-B14F-4D97-AF65-F5344CB8AC3E}">
-        <p14:creationId xmlns:p14="http://schemas.microsoft.com/office/powerpoint/2010/main" val="650479853"/>
-      </p:ext>
-    </p:extLst>
-  </p:cSld>
-  <p:clrMapOvr>
-    <a:masterClrMapping/>
-  </p:clrMapOvr>
-</p:sld>
-</file>
-
-<file path=ppt/slides/slide2.xml><?xml version="1.0" encoding="utf-8"?>
-<p:sld xmlns:a="http://schemas.openxmlformats.org/drawingml/2006/main" xmlns:r="http://schemas.openxmlformats.org/officeDocument/2006/relationships" xmlns:p="http://schemas.openxmlformats.org/presentationml/2006/main">
-  <p:cSld>
-    <p:spTree>
-      <p:nvGrpSpPr>
-        <p:cNvPr id="1" name=""/>
-        <p:cNvGrpSpPr/>
-        <p:nvPr/>
-      </p:nvGrpSpPr>
-      <p:grpSpPr>
-        <a:xfrm>
-          <a:off x="0" y="0"/>
-          <a:ext cx="0" cy="0"/>
-          <a:chOff x="0" y="0"/>
-          <a:chExt cx="0" cy="0"/>
-        </a:xfrm>
-      </p:grpSpPr>
-      <p:sp>
-        <p:nvSpPr>
-          <p:cNvPr id="2" name="Title 1">
-            <a:extLst>
-              <a:ext uri="{FF2B5EF4-FFF2-40B4-BE49-F238E27FC236}">
-                <a16:creationId xmlns:a16="http://schemas.microsoft.com/office/drawing/2014/main" id="{6CB71B9B-FD91-B656-2CD3-0215F6488C6A}"/>
-              </a:ext>
-            </a:extLst>
-          </p:cNvPr>
-          <p:cNvSpPr>
-            <a:spLocks noGrp="1"/>
-          </p:cNvSpPr>
-          <p:nvPr>
-            <p:ph type="title"/>
-          </p:nvPr>
-        </p:nvSpPr>
-        <p:spPr/>
-        <p:txBody>
-          <a:bodyPr/>
-          <a:lstStyle/>
-          <a:p>
-            <a:endParaRPr lang="en-US"/>
-          </a:p>
-        </p:txBody>
-      </p:sp>
-      <p:sp>
-        <p:nvSpPr>
-          <p:cNvPr id="3" name="Content Placeholder 2">
-            <a:extLst>
-              <a:ext uri="{FF2B5EF4-FFF2-40B4-BE49-F238E27FC236}">
-                <a16:creationId xmlns:a16="http://schemas.microsoft.com/office/drawing/2014/main" id="{34445856-D79F-D9E2-3B91-66B7FE86C1FC}"/>
-              </a:ext>
-            </a:extLst>
-          </p:cNvPr>
-          <p:cNvSpPr>
-            <a:spLocks noGrp="1"/>
-          </p:cNvSpPr>
-          <p:nvPr>
-            <p:ph idx="1"/>
-          </p:nvPr>
-        </p:nvSpPr>
-        <p:spPr/>
-        <p:txBody>
-          <a:bodyPr/>
-          <a:lstStyle/>
-          <a:p>
-            <a:endParaRPr lang="en-US"/>
-          </a:p>
-        </p:txBody>
-      </p:sp>
-      <p:pic>
-        <p:nvPicPr>
-          <p:cNvPr id="5" name="Picture 4">
-            <a:extLst>
-              <a:ext uri="{FF2B5EF4-FFF2-40B4-BE49-F238E27FC236}">
-                <a16:creationId xmlns:a16="http://schemas.microsoft.com/office/drawing/2014/main" id="{370F0946-653A-91DF-3BA6-3C3CEAF9099E}"/>
-              </a:ext>
-            </a:extLst>
-          </p:cNvPr>
-          <p:cNvPicPr>
-            <a:picLocks noChangeAspect="1"/>
-          </p:cNvPicPr>
-          <p:nvPr/>
-        </p:nvPicPr>
-        <p:blipFill>
-          <a:blip r:embed="rId2"/>
-          <a:stretch>
-            <a:fillRect/>
-          </a:stretch>
-        </p:blipFill>
-        <p:spPr>
-          <a:xfrm>
-            <a:off x="0" y="0"/>
-            <a:ext cx="12192000" cy="6858000"/>
-          </a:xfrm>
-          <a:prstGeom prst="rect">
-            <a:avLst/>
-          </a:prstGeom>
-        </p:spPr>
-      </p:pic>
-    </p:spTree>
-    <p:extLst>
-      <p:ext uri="{BB962C8B-B14F-4D97-AF65-F5344CB8AC3E}">
-        <p14:creationId xmlns:p14="http://schemas.microsoft.com/office/powerpoint/2010/main" val="2517798921"/>
-      </p:ext>
-    </p:extLst>
-  </p:cSld>
-  <p:clrMapOvr>
-    <a:masterClrMapping/>
-  </p:clrMapOvr>
-</p:sld>
-</file>
-
-<file path=ppt/slides/slide20.xml><?xml version="1.0" encoding="utf-8"?>
-<p:sld xmlns:a="http://schemas.openxmlformats.org/drawingml/2006/main" xmlns:r="http://schemas.openxmlformats.org/officeDocument/2006/relationships" xmlns:p="http://schemas.openxmlformats.org/presentationml/2006/main">
-  <p:cSld>
-    <p:spTree>
-      <p:nvGrpSpPr>
-        <p:cNvPr id="1" name=""/>
-        <p:cNvGrpSpPr/>
-        <p:nvPr/>
-      </p:nvGrpSpPr>
-      <p:grpSpPr>
-        <a:xfrm>
-          <a:off x="0" y="0"/>
-          <a:ext cx="0" cy="0"/>
-          <a:chOff x="0" y="0"/>
-          <a:chExt cx="0" cy="0"/>
-        </a:xfrm>
-      </p:grpSpPr>
-      <p:sp>
-        <p:nvSpPr>
-          <p:cNvPr id="2" name="Title 1">
-            <a:extLst>
-              <a:ext uri="{FF2B5EF4-FFF2-40B4-BE49-F238E27FC236}">
-                <a16:creationId xmlns:a16="http://schemas.microsoft.com/office/drawing/2014/main" id="{494140F7-22AF-2ACF-10D8-501FCC981CD6}"/>
-              </a:ext>
-            </a:extLst>
-          </p:cNvPr>
-          <p:cNvSpPr>
-            <a:spLocks noGrp="1"/>
-          </p:cNvSpPr>
-          <p:nvPr>
-            <p:ph type="title"/>
-          </p:nvPr>
-        </p:nvSpPr>
-        <p:spPr/>
-        <p:txBody>
-          <a:bodyPr/>
-          <a:lstStyle/>
-          <a:p>
-            <a:endParaRPr lang="en-US"/>
-          </a:p>
-        </p:txBody>
-      </p:sp>
-      <p:sp>
-        <p:nvSpPr>
-          <p:cNvPr id="3" name="Content Placeholder 2">
-            <a:extLst>
-              <a:ext uri="{FF2B5EF4-FFF2-40B4-BE49-F238E27FC236}">
-                <a16:creationId xmlns:a16="http://schemas.microsoft.com/office/drawing/2014/main" id="{AD8EE1C4-8F6C-BED5-8A8B-FCAF54011FA9}"/>
-              </a:ext>
-            </a:extLst>
-          </p:cNvPr>
-          <p:cNvSpPr>
-            <a:spLocks noGrp="1"/>
-          </p:cNvSpPr>
-          <p:nvPr>
-            <p:ph idx="1"/>
-          </p:nvPr>
-        </p:nvSpPr>
-        <p:spPr/>
-        <p:txBody>
-          <a:bodyPr/>
-          <a:lstStyle/>
-          <a:p>
-            <a:endParaRPr lang="en-US"/>
-          </a:p>
-        </p:txBody>
-      </p:sp>
-      <p:pic>
-        <p:nvPicPr>
-          <p:cNvPr id="5" name="Picture 4">
-            <a:extLst>
-              <a:ext uri="{FF2B5EF4-FFF2-40B4-BE49-F238E27FC236}">
-                <a16:creationId xmlns:a16="http://schemas.microsoft.com/office/drawing/2014/main" id="{4370B3F8-B29A-4162-5F87-2F9CF2248DA5}"/>
-              </a:ext>
-            </a:extLst>
-          </p:cNvPr>
-          <p:cNvPicPr>
-            <a:picLocks noChangeAspect="1"/>
-          </p:cNvPicPr>
-          <p:nvPr/>
-        </p:nvPicPr>
-        <p:blipFill>
-          <a:blip r:embed="rId2"/>
-          <a:stretch>
-            <a:fillRect/>
-          </a:stretch>
-        </p:blipFill>
-        <p:spPr>
-          <a:xfrm>
-            <a:off x="0" y="0"/>
-            <a:ext cx="12192000" cy="6858000"/>
-          </a:xfrm>
-          <a:prstGeom prst="rect">
-            <a:avLst/>
-          </a:prstGeom>
-        </p:spPr>
-      </p:pic>
-    </p:spTree>
-    <p:extLst>
-      <p:ext uri="{BB962C8B-B14F-4D97-AF65-F5344CB8AC3E}">
-        <p14:creationId xmlns:p14="http://schemas.microsoft.com/office/powerpoint/2010/main" val="2785072448"/>
-      </p:ext>
-    </p:extLst>
-  </p:cSld>
-  <p:clrMapOvr>
-    <a:masterClrMapping/>
-  </p:clrMapOvr>
-</p:sld>
-</file>
-
-<file path=ppt/slides/slide3.xml><?xml version="1.0" encoding="utf-8"?>
-<p:sld xmlns:a="http://schemas.openxmlformats.org/drawingml/2006/main" xmlns:r="http://schemas.openxmlformats.org/officeDocument/2006/relationships" xmlns:p="http://schemas.openxmlformats.org/presentationml/2006/main">
-  <p:cSld>
-    <p:spTree>
-      <p:nvGrpSpPr>
-        <p:cNvPr id="1" name=""/>
-        <p:cNvGrpSpPr/>
-        <p:nvPr/>
-      </p:nvGrpSpPr>
-      <p:grpSpPr>
-        <a:xfrm>
-          <a:off x="0" y="0"/>
-          <a:ext cx="0" cy="0"/>
-          <a:chOff x="0" y="0"/>
-          <a:chExt cx="0" cy="0"/>
-        </a:xfrm>
-      </p:grpSpPr>
-      <p:sp>
-        <p:nvSpPr>
-          <p:cNvPr id="2" name="Title 1">
-            <a:extLst>
-              <a:ext uri="{FF2B5EF4-FFF2-40B4-BE49-F238E27FC236}">
-                <a16:creationId xmlns:a16="http://schemas.microsoft.com/office/drawing/2014/main" id="{A048BFD7-A669-8388-5B57-991CA20270B0}"/>
-              </a:ext>
-            </a:extLst>
-          </p:cNvPr>
-          <p:cNvSpPr>
-            <a:spLocks noGrp="1"/>
-          </p:cNvSpPr>
-          <p:nvPr>
-            <p:ph type="title"/>
-          </p:nvPr>
-        </p:nvSpPr>
-        <p:spPr/>
-        <p:txBody>
-          <a:bodyPr/>
-          <a:lstStyle/>
-          <a:p>
-            <a:endParaRPr lang="en-US"/>
-          </a:p>
-        </p:txBody>
-      </p:sp>
-      <p:sp>
-        <p:nvSpPr>
-          <p:cNvPr id="3" name="Content Placeholder 2">
-            <a:extLst>
-              <a:ext uri="{FF2B5EF4-FFF2-40B4-BE49-F238E27FC236}">
-                <a16:creationId xmlns:a16="http://schemas.microsoft.com/office/drawing/2014/main" id="{F99A5F70-E9EF-4B12-8709-44101CD65098}"/>
-              </a:ext>
-            </a:extLst>
-          </p:cNvPr>
-          <p:cNvSpPr>
-            <a:spLocks noGrp="1"/>
-          </p:cNvSpPr>
-          <p:nvPr>
-            <p:ph idx="1"/>
-          </p:nvPr>
-        </p:nvSpPr>
-        <p:spPr/>
-        <p:txBody>
-          <a:bodyPr/>
-          <a:lstStyle/>
-          <a:p>
-            <a:endParaRPr lang="en-US"/>
-          </a:p>
-        </p:txBody>
-      </p:sp>
-      <p:pic>
-        <p:nvPicPr>
-          <p:cNvPr id="5" name="Picture 4">
-            <a:extLst>
-              <a:ext uri="{FF2B5EF4-FFF2-40B4-BE49-F238E27FC236}">
-                <a16:creationId xmlns:a16="http://schemas.microsoft.com/office/drawing/2014/main" id="{199E115C-59AF-8B2B-A406-EB5C474AFAAB}"/>
-              </a:ext>
-            </a:extLst>
-          </p:cNvPr>
-          <p:cNvPicPr>
-            <a:picLocks noChangeAspect="1"/>
-          </p:cNvPicPr>
-          <p:nvPr/>
-        </p:nvPicPr>
-        <p:blipFill>
-          <a:blip r:embed="rId2"/>
-          <a:stretch>
-            <a:fillRect/>
-          </a:stretch>
-        </p:blipFill>
-        <p:spPr>
-          <a:xfrm>
-            <a:off x="0" y="0"/>
-            <a:ext cx="12192000" cy="6858000"/>
-          </a:xfrm>
-          <a:prstGeom prst="rect">
-            <a:avLst/>
-          </a:prstGeom>
-        </p:spPr>
-      </p:pic>
-    </p:spTree>
-    <p:extLst>
-      <p:ext uri="{BB962C8B-B14F-4D97-AF65-F5344CB8AC3E}">
-        <p14:creationId xmlns:p14="http://schemas.microsoft.com/office/powerpoint/2010/main" val="1796035119"/>
-      </p:ext>
-    </p:extLst>
-  </p:cSld>
-  <p:clrMapOvr>
-    <a:masterClrMapping/>
-  </p:clrMapOvr>
-</p:sld>
-</file>
-
-<file path=ppt/slides/slide4.xml><?xml version="1.0" encoding="utf-8"?>
-<p:sld xmlns:a="http://schemas.openxmlformats.org/drawingml/2006/main" xmlns:r="http://schemas.openxmlformats.org/officeDocument/2006/relationships" xmlns:p="http://schemas.openxmlformats.org/presentationml/2006/main">
-  <p:cSld>
-    <p:spTree>
-      <p:nvGrpSpPr>
-        <p:cNvPr id="1" name=""/>
-        <p:cNvGrpSpPr/>
-        <p:nvPr/>
-      </p:nvGrpSpPr>
-      <p:grpSpPr>
-        <a:xfrm>
-          <a:off x="0" y="0"/>
-          <a:ext cx="0" cy="0"/>
-          <a:chOff x="0" y="0"/>
-          <a:chExt cx="0" cy="0"/>
-        </a:xfrm>
-      </p:grpSpPr>
-      <p:sp>
-        <p:nvSpPr>
-          <p:cNvPr id="2" name="Title 1">
-            <a:extLst>
-              <a:ext uri="{FF2B5EF4-FFF2-40B4-BE49-F238E27FC236}">
-                <a16:creationId xmlns:a16="http://schemas.microsoft.com/office/drawing/2014/main" id="{F14B18A6-6ACB-666A-A756-0AE5F1C8DB28}"/>
-              </a:ext>
-            </a:extLst>
-          </p:cNvPr>
-          <p:cNvSpPr>
-            <a:spLocks noGrp="1"/>
-          </p:cNvSpPr>
-          <p:nvPr>
-            <p:ph type="title"/>
-          </p:nvPr>
-        </p:nvSpPr>
-        <p:spPr/>
-        <p:txBody>
-          <a:bodyPr/>
-          <a:lstStyle/>
-          <a:p>
-            <a:endParaRPr lang="en-US"/>
-          </a:p>
-        </p:txBody>
-      </p:sp>
-      <p:sp>
-        <p:nvSpPr>
-          <p:cNvPr id="3" name="Content Placeholder 2">
-            <a:extLst>
-              <a:ext uri="{FF2B5EF4-FFF2-40B4-BE49-F238E27FC236}">
-                <a16:creationId xmlns:a16="http://schemas.microsoft.com/office/drawing/2014/main" id="{45D896D2-A227-758F-1DFB-052B0C2004EC}"/>
-              </a:ext>
-            </a:extLst>
-          </p:cNvPr>
-          <p:cNvSpPr>
-            <a:spLocks noGrp="1"/>
-          </p:cNvSpPr>
-          <p:nvPr>
-            <p:ph idx="1"/>
-          </p:nvPr>
-        </p:nvSpPr>
-        <p:spPr/>
-        <p:txBody>
-          <a:bodyPr/>
-          <a:lstStyle/>
-          <a:p>
-            <a:endParaRPr lang="en-US"/>
-          </a:p>
-        </p:txBody>
-      </p:sp>
-      <p:pic>
-        <p:nvPicPr>
-          <p:cNvPr id="5" name="Picture 4">
-            <a:extLst>
-              <a:ext uri="{FF2B5EF4-FFF2-40B4-BE49-F238E27FC236}">
-                <a16:creationId xmlns:a16="http://schemas.microsoft.com/office/drawing/2014/main" id="{50F9141A-245F-A027-9989-CFC7B26B0AF5}"/>
-              </a:ext>
-            </a:extLst>
-          </p:cNvPr>
-          <p:cNvPicPr>
-            <a:picLocks noChangeAspect="1"/>
-          </p:cNvPicPr>
-          <p:nvPr/>
-        </p:nvPicPr>
-        <p:blipFill>
-          <a:blip r:embed="rId2"/>
-          <a:stretch>
-            <a:fillRect/>
-          </a:stretch>
-        </p:blipFill>
-        <p:spPr>
-          <a:xfrm>
-            <a:off x="0" y="0"/>
-            <a:ext cx="12192000" cy="6858000"/>
-          </a:xfrm>
-          <a:prstGeom prst="rect">
-            <a:avLst/>
-          </a:prstGeom>
-        </p:spPr>
-      </p:pic>
-    </p:spTree>
-    <p:extLst>
-      <p:ext uri="{BB962C8B-B14F-4D97-AF65-F5344CB8AC3E}">
-        <p14:creationId xmlns:p14="http://schemas.microsoft.com/office/powerpoint/2010/main" val="3243850376"/>
-      </p:ext>
-    </p:extLst>
-  </p:cSld>
-  <p:clrMapOvr>
-    <a:masterClrMapping/>
-  </p:clrMapOvr>
-</p:sld>
-</file>
-
-<file path=ppt/slides/slide5.xml><?xml version="1.0" encoding="utf-8"?>
-<p:sld xmlns:a="http://schemas.openxmlformats.org/drawingml/2006/main" xmlns:r="http://schemas.openxmlformats.org/officeDocument/2006/relationships" xmlns:p="http://schemas.openxmlformats.org/presentationml/2006/main">
-  <p:cSld>
-    <p:spTree>
-      <p:nvGrpSpPr>
-        <p:cNvPr id="1" name=""/>
-        <p:cNvGrpSpPr/>
-        <p:nvPr/>
-      </p:nvGrpSpPr>
-      <p:grpSpPr>
-        <a:xfrm>
-          <a:off x="0" y="0"/>
-          <a:ext cx="0" cy="0"/>
-          <a:chOff x="0" y="0"/>
-          <a:chExt cx="0" cy="0"/>
-        </a:xfrm>
-      </p:grpSpPr>
-      <p:sp>
-        <p:nvSpPr>
-          <p:cNvPr id="2" name="Title 1">
-            <a:extLst>
-              <a:ext uri="{FF2B5EF4-FFF2-40B4-BE49-F238E27FC236}">
-                <a16:creationId xmlns:a16="http://schemas.microsoft.com/office/drawing/2014/main" id="{9BC00C70-F0AA-CE5C-E146-8453C6EBCC1E}"/>
-              </a:ext>
-            </a:extLst>
-          </p:cNvPr>
-          <p:cNvSpPr>
-            <a:spLocks noGrp="1"/>
-          </p:cNvSpPr>
-          <p:nvPr>
-            <p:ph type="title"/>
-          </p:nvPr>
-        </p:nvSpPr>
-        <p:spPr/>
-        <p:txBody>
-          <a:bodyPr/>
-          <a:lstStyle/>
-          <a:p>
-            <a:endParaRPr lang="en-US"/>
-          </a:p>
-        </p:txBody>
-      </p:sp>
-      <p:sp>
-        <p:nvSpPr>
-          <p:cNvPr id="3" name="Content Placeholder 2">
-            <a:extLst>
-              <a:ext uri="{FF2B5EF4-FFF2-40B4-BE49-F238E27FC236}">
-                <a16:creationId xmlns:a16="http://schemas.microsoft.com/office/drawing/2014/main" id="{2F5340BA-C00A-AA5E-4207-A09278132D2A}"/>
-              </a:ext>
-            </a:extLst>
-          </p:cNvPr>
-          <p:cNvSpPr>
-            <a:spLocks noGrp="1"/>
-          </p:cNvSpPr>
-          <p:nvPr>
-            <p:ph idx="1"/>
-          </p:nvPr>
-        </p:nvSpPr>
-        <p:spPr/>
-        <p:txBody>
-          <a:bodyPr/>
-          <a:lstStyle/>
-          <a:p>
-            <a:endParaRPr lang="en-US"/>
-          </a:p>
-        </p:txBody>
-      </p:sp>
-      <p:pic>
-        <p:nvPicPr>
-          <p:cNvPr id="5" name="Picture 4">
-            <a:extLst>
-              <a:ext uri="{FF2B5EF4-FFF2-40B4-BE49-F238E27FC236}">
-                <a16:creationId xmlns:a16="http://schemas.microsoft.com/office/drawing/2014/main" id="{67423ACE-AC77-AAAD-F8B6-553FD3D3970D}"/>
-              </a:ext>
-            </a:extLst>
-          </p:cNvPr>
-          <p:cNvPicPr>
-            <a:picLocks noChangeAspect="1"/>
-          </p:cNvPicPr>
-          <p:nvPr/>
-        </p:nvPicPr>
-        <p:blipFill>
-          <a:blip r:embed="rId2"/>
-          <a:stretch>
-            <a:fillRect/>
-          </a:stretch>
-        </p:blipFill>
-        <p:spPr>
-          <a:xfrm>
-            <a:off x="0" y="3810"/>
-            <a:ext cx="12192000" cy="6850380"/>
-          </a:xfrm>
-          <a:prstGeom prst="rect">
-            <a:avLst/>
-          </a:prstGeom>
-        </p:spPr>
-      </p:pic>
-    </p:spTree>
-    <p:extLst>
-      <p:ext uri="{BB962C8B-B14F-4D97-AF65-F5344CB8AC3E}">
-        <p14:creationId xmlns:p14="http://schemas.microsoft.com/office/powerpoint/2010/main" val="2422867727"/>
-      </p:ext>
-    </p:extLst>
-  </p:cSld>
-  <p:clrMapOvr>
-    <a:masterClrMapping/>
-  </p:clrMapOvr>
-</p:sld>
-</file>
-
-<file path=ppt/slides/slide6.xml><?xml version="1.0" encoding="utf-8"?>
-<p:sld xmlns:a="http://schemas.openxmlformats.org/drawingml/2006/main" xmlns:r="http://schemas.openxmlformats.org/officeDocument/2006/relationships" xmlns:p="http://schemas.openxmlformats.org/presentationml/2006/main">
-  <p:cSld>
-    <p:spTree>
-      <p:nvGrpSpPr>
-        <p:cNvPr id="1" name=""/>
-        <p:cNvGrpSpPr/>
-        <p:nvPr/>
-      </p:nvGrpSpPr>
-      <p:grpSpPr>
-        <a:xfrm>
-          <a:off x="0" y="0"/>
-          <a:ext cx="0" cy="0"/>
-          <a:chOff x="0" y="0"/>
-          <a:chExt cx="0" cy="0"/>
-        </a:xfrm>
-      </p:grpSpPr>
-      <p:sp>
-        <p:nvSpPr>
-          <p:cNvPr id="2" name="Title 1">
-            <a:extLst>
-              <a:ext uri="{FF2B5EF4-FFF2-40B4-BE49-F238E27FC236}">
-                <a16:creationId xmlns:a16="http://schemas.microsoft.com/office/drawing/2014/main" id="{B51E9F69-89FC-0F72-FF95-140003358C36}"/>
-              </a:ext>
-            </a:extLst>
-          </p:cNvPr>
-          <p:cNvSpPr>
-            <a:spLocks noGrp="1"/>
-          </p:cNvSpPr>
-          <p:nvPr>
-            <p:ph type="title"/>
-          </p:nvPr>
-        </p:nvSpPr>
-        <p:spPr/>
-        <p:txBody>
-          <a:bodyPr/>
-          <a:lstStyle/>
-          <a:p>
-            <a:endParaRPr lang="en-US"/>
-          </a:p>
-        </p:txBody>
-      </p:sp>
-      <p:sp>
-        <p:nvSpPr>
-          <p:cNvPr id="3" name="Content Placeholder 2">
-            <a:extLst>
-              <a:ext uri="{FF2B5EF4-FFF2-40B4-BE49-F238E27FC236}">
-                <a16:creationId xmlns:a16="http://schemas.microsoft.com/office/drawing/2014/main" id="{B3C3938E-CCC1-F946-A2B4-A16BC5A7D012}"/>
-              </a:ext>
-            </a:extLst>
-          </p:cNvPr>
-          <p:cNvSpPr>
-            <a:spLocks noGrp="1"/>
-          </p:cNvSpPr>
-          <p:nvPr>
-            <p:ph idx="1"/>
-          </p:nvPr>
-        </p:nvSpPr>
-        <p:spPr/>
-        <p:txBody>
-          <a:bodyPr/>
-          <a:lstStyle/>
-          <a:p>
-            <a:endParaRPr lang="en-US"/>
-          </a:p>
-        </p:txBody>
-      </p:sp>
-      <p:pic>
-        <p:nvPicPr>
-          <p:cNvPr id="5" name="Picture 4">
-            <a:extLst>
-              <a:ext uri="{FF2B5EF4-FFF2-40B4-BE49-F238E27FC236}">
-                <a16:creationId xmlns:a16="http://schemas.microsoft.com/office/drawing/2014/main" id="{385E80E0-86A1-DB10-7DCC-DF1E7312C2C2}"/>
-              </a:ext>
-            </a:extLst>
-          </p:cNvPr>
-          <p:cNvPicPr>
-            <a:picLocks noChangeAspect="1"/>
-          </p:cNvPicPr>
-          <p:nvPr/>
-        </p:nvPicPr>
-        <p:blipFill>
-          <a:blip r:embed="rId2"/>
-          <a:stretch>
-            <a:fillRect/>
-          </a:stretch>
-        </p:blipFill>
-        <p:spPr>
-          <a:xfrm>
-            <a:off x="0" y="0"/>
-            <a:ext cx="12192000" cy="6858000"/>
-          </a:xfrm>
-          <a:prstGeom prst="rect">
-            <a:avLst/>
-          </a:prstGeom>
-        </p:spPr>
-      </p:pic>
-    </p:spTree>
-    <p:extLst>
-      <p:ext uri="{BB962C8B-B14F-4D97-AF65-F5344CB8AC3E}">
-        <p14:creationId xmlns:p14="http://schemas.microsoft.com/office/powerpoint/2010/main" val="1028410373"/>
-      </p:ext>
-    </p:extLst>
-  </p:cSld>
-  <p:clrMapOvr>
-    <a:masterClrMapping/>
-  </p:clrMapOvr>
-</p:sld>
-</file>
-
-<file path=ppt/slides/slide7.xml><?xml version="1.0" encoding="utf-8"?>
-<p:sld xmlns:a="http://schemas.openxmlformats.org/drawingml/2006/main" xmlns:r="http://schemas.openxmlformats.org/officeDocument/2006/relationships" xmlns:p="http://schemas.openxmlformats.org/presentationml/2006/main">
-  <p:cSld>
-    <p:spTree>
-      <p:nvGrpSpPr>
-        <p:cNvPr id="1" name=""/>
-        <p:cNvGrpSpPr/>
-        <p:nvPr/>
-      </p:nvGrpSpPr>
-      <p:grpSpPr>
-        <a:xfrm>
-          <a:off x="0" y="0"/>
-          <a:ext cx="0" cy="0"/>
-          <a:chOff x="0" y="0"/>
-          <a:chExt cx="0" cy="0"/>
-        </a:xfrm>
-      </p:grpSpPr>
-      <p:sp>
-        <p:nvSpPr>
-          <p:cNvPr id="2" name="Title 1">
-            <a:extLst>
-              <a:ext uri="{FF2B5EF4-FFF2-40B4-BE49-F238E27FC236}">
-                <a16:creationId xmlns:a16="http://schemas.microsoft.com/office/drawing/2014/main" id="{D7078CBB-9DBA-08B8-3EC2-BF3ACC58DCD4}"/>
-              </a:ext>
-            </a:extLst>
-          </p:cNvPr>
-          <p:cNvSpPr>
-            <a:spLocks noGrp="1"/>
-          </p:cNvSpPr>
-          <p:nvPr>
-            <p:ph type="title"/>
-          </p:nvPr>
-        </p:nvSpPr>
-        <p:spPr/>
-        <p:txBody>
-          <a:bodyPr/>
-          <a:lstStyle/>
-          <a:p>
-            <a:endParaRPr lang="en-US"/>
-          </a:p>
-        </p:txBody>
-      </p:sp>
-      <p:sp>
-        <p:nvSpPr>
-          <p:cNvPr id="3" name="Content Placeholder 2">
-            <a:extLst>
-              <a:ext uri="{FF2B5EF4-FFF2-40B4-BE49-F238E27FC236}">
-                <a16:creationId xmlns:a16="http://schemas.microsoft.com/office/drawing/2014/main" id="{23903C34-3D97-C4A2-D90E-8B16EA0E362F}"/>
-              </a:ext>
-            </a:extLst>
-          </p:cNvPr>
-          <p:cNvSpPr>
-            <a:spLocks noGrp="1"/>
-          </p:cNvSpPr>
-          <p:nvPr>
-            <p:ph idx="1"/>
-          </p:nvPr>
-        </p:nvSpPr>
-        <p:spPr/>
-        <p:txBody>
-          <a:bodyPr/>
-          <a:lstStyle/>
-          <a:p>
-            <a:endParaRPr lang="en-US"/>
-          </a:p>
-        </p:txBody>
-      </p:sp>
-      <p:pic>
-        <p:nvPicPr>
-          <p:cNvPr id="5" name="Picture 4">
-            <a:extLst>
-              <a:ext uri="{FF2B5EF4-FFF2-40B4-BE49-F238E27FC236}">
-                <a16:creationId xmlns:a16="http://schemas.microsoft.com/office/drawing/2014/main" id="{124008D0-850A-294C-F61A-1DA0FAEC8B44}"/>
-              </a:ext>
-            </a:extLst>
-          </p:cNvPr>
-          <p:cNvPicPr>
-            <a:picLocks noChangeAspect="1"/>
-          </p:cNvPicPr>
-          <p:nvPr/>
-        </p:nvPicPr>
-        <p:blipFill>
-          <a:blip r:embed="rId2"/>
-          <a:stretch>
-            <a:fillRect/>
-          </a:stretch>
-        </p:blipFill>
-        <p:spPr>
-          <a:xfrm>
-            <a:off x="0" y="0"/>
-            <a:ext cx="12192000" cy="6858000"/>
-          </a:xfrm>
-          <a:prstGeom prst="rect">
-            <a:avLst/>
-          </a:prstGeom>
-        </p:spPr>
-      </p:pic>
-    </p:spTree>
-    <p:extLst>
-      <p:ext uri="{BB962C8B-B14F-4D97-AF65-F5344CB8AC3E}">
-        <p14:creationId xmlns:p14="http://schemas.microsoft.com/office/powerpoint/2010/main" val="145108096"/>
+        <p14:creationId xmlns:p14="http://schemas.microsoft.com/office/powerpoint/2010/main" val="2216004213"/>
       </p:ext>
     </p:extLst>
   </p:cSld>
@@ -5385,7 +6186,7 @@
           <p:cNvPr id="2" name="Title 1">
             <a:extLst>
               <a:ext uri="{FF2B5EF4-FFF2-40B4-BE49-F238E27FC236}">
-                <a16:creationId xmlns:a16="http://schemas.microsoft.com/office/drawing/2014/main" id="{8803A4F4-8D9E-90CF-A461-A91A759B4DA7}"/>
+                <a16:creationId xmlns:a16="http://schemas.microsoft.com/office/drawing/2014/main" id="{DB10EA00-8551-8C9F-5A35-183F1FC5B4C8}"/>
               </a:ext>
             </a:extLst>
           </p:cNvPr>
@@ -5401,7 +6202,7 @@
           <a:bodyPr/>
           <a:lstStyle/>
           <a:p>
-            <a:endParaRPr lang="en-US"/>
+            <a:endParaRPr lang="fr-FR" noProof="0" dirty="0"/>
           </a:p>
         </p:txBody>
       </p:sp>
@@ -5410,7 +6211,7 @@
           <p:cNvPr id="3" name="Content Placeholder 2">
             <a:extLst>
               <a:ext uri="{FF2B5EF4-FFF2-40B4-BE49-F238E27FC236}">
-                <a16:creationId xmlns:a16="http://schemas.microsoft.com/office/drawing/2014/main" id="{E9E4914B-F91A-6F42-ABF0-A44267EE5F3B}"/>
+                <a16:creationId xmlns:a16="http://schemas.microsoft.com/office/drawing/2014/main" id="{9D91F81C-4F56-F072-25E3-C4C1DF48EA87}"/>
               </a:ext>
             </a:extLst>
           </p:cNvPr>
@@ -5426,16 +6227,17 @@
           <a:bodyPr/>
           <a:lstStyle/>
           <a:p>
-            <a:endParaRPr lang="en-US"/>
+            <a:endParaRPr lang="fr-FR" noProof="0" dirty="0"/>
           </a:p>
         </p:txBody>
       </p:sp>
       <p:pic>
         <p:nvPicPr>
           <p:cNvPr id="5" name="Picture 4">
-            <a:extLst>
-              <a:ext uri="{FF2B5EF4-FFF2-40B4-BE49-F238E27FC236}">
-                <a16:creationId xmlns:a16="http://schemas.microsoft.com/office/drawing/2014/main" id="{FC2FE4C0-7438-E27D-C2F9-8C30FE999BC2}"/>
+            <a:hlinkClick r:id="rId3"/>
+            <a:extLst>
+              <a:ext uri="{FF2B5EF4-FFF2-40B4-BE49-F238E27FC236}">
+                <a16:creationId xmlns:a16="http://schemas.microsoft.com/office/drawing/2014/main" id="{C0998C09-D7CE-D558-0C48-DDE37A716A10}"/>
               </a:ext>
             </a:extLst>
           </p:cNvPr>
@@ -5445,7 +6247,7 @@
           <p:nvPr/>
         </p:nvPicPr>
         <p:blipFill>
-          <a:blip r:embed="rId2"/>
+          <a:blip r:embed="rId4"/>
           <a:stretch>
             <a:fillRect/>
           </a:stretch>
@@ -5463,7 +6265,7 @@
     </p:spTree>
     <p:extLst>
       <p:ext uri="{BB962C8B-B14F-4D97-AF65-F5344CB8AC3E}">
-        <p14:creationId xmlns:p14="http://schemas.microsoft.com/office/powerpoint/2010/main" val="764632822"/>
+        <p14:creationId xmlns:p14="http://schemas.microsoft.com/office/powerpoint/2010/main" val="2776625340"/>
       </p:ext>
     </p:extLst>
   </p:cSld>
@@ -5476,6 +6278,14 @@
 <file path=ppt/slides/slide9.xml><?xml version="1.0" encoding="utf-8"?>
 <p:sld xmlns:a="http://schemas.openxmlformats.org/drawingml/2006/main" xmlns:r="http://schemas.openxmlformats.org/officeDocument/2006/relationships" xmlns:p="http://schemas.openxmlformats.org/presentationml/2006/main">
   <p:cSld>
+    <p:bg>
+      <p:bgPr>
+        <a:solidFill>
+          <a:schemeClr val="bg1"/>
+        </a:solidFill>
+        <a:effectLst/>
+      </p:bgPr>
+    </p:bg>
     <p:spTree>
       <p:nvGrpSpPr>
         <p:cNvPr id="1" name=""/>
@@ -5492,35 +6302,165 @@
       </p:grpSpPr>
       <p:sp>
         <p:nvSpPr>
-          <p:cNvPr id="2" name="Title 1">
-            <a:extLst>
-              <a:ext uri="{FF2B5EF4-FFF2-40B4-BE49-F238E27FC236}">
-                <a16:creationId xmlns:a16="http://schemas.microsoft.com/office/drawing/2014/main" id="{D4E63E90-C306-E3A3-A572-7CBA4AE3CB83}"/>
-              </a:ext>
-            </a:extLst>
-          </p:cNvPr>
-          <p:cNvSpPr>
-            <a:spLocks noGrp="1"/>
-          </p:cNvSpPr>
-          <p:nvPr>
-            <p:ph type="title"/>
-          </p:nvPr>
-        </p:nvSpPr>
-        <p:spPr/>
-        <p:txBody>
-          <a:bodyPr/>
-          <a:lstStyle/>
-          <a:p>
-            <a:endParaRPr lang="en-US"/>
-          </a:p>
-        </p:txBody>
-      </p:sp>
-      <p:sp>
-        <p:nvSpPr>
-          <p:cNvPr id="3" name="Content Placeholder 2">
-            <a:extLst>
-              <a:ext uri="{FF2B5EF4-FFF2-40B4-BE49-F238E27FC236}">
-                <a16:creationId xmlns:a16="http://schemas.microsoft.com/office/drawing/2014/main" id="{D9F5F88A-BC4F-3E1D-6D0A-49AB3149FA06}"/>
+          <p:cNvPr id="15" name="Rectangle 14">
+            <a:extLst>
+              <a:ext uri="{FF2B5EF4-FFF2-40B4-BE49-F238E27FC236}">
+                <a16:creationId xmlns:a16="http://schemas.microsoft.com/office/drawing/2014/main" id="{42A4FC2C-047E-45A5-965D-8E1E3BF09BC6}"/>
+              </a:ext>
+              <a:ext uri="{C183D7F6-B498-43B3-948B-1728B52AA6E4}">
+                <adec:decorative xmlns:adec="http://schemas.microsoft.com/office/drawing/2017/decorative" val="1"/>
+              </a:ext>
+            </a:extLst>
+          </p:cNvPr>
+          <p:cNvSpPr>
+            <a:spLocks noGrp="1" noRot="1" noChangeAspect="1" noMove="1" noResize="1" noEditPoints="1" noAdjustHandles="1" noChangeArrowheads="1" noChangeShapeType="1" noTextEdit="1"/>
+          </p:cNvSpPr>
+          <p:nvPr>
+            <p:extLst>
+              <p:ext uri="{386F3935-93C4-4BCD-93E2-E3B085C9AB24}">
+                <p16:designElem xmlns:p16="http://schemas.microsoft.com/office/powerpoint/2015/main" val="1"/>
+              </p:ext>
+            </p:extLst>
+          </p:nvPr>
+        </p:nvSpPr>
+        <p:spPr bwMode="white">
+          <a:xfrm>
+            <a:off x="1524" y="0"/>
+            <a:ext cx="12188952" cy="6858000"/>
+          </a:xfrm>
+          <a:prstGeom prst="rect">
+            <a:avLst/>
+          </a:prstGeom>
+          <a:noFill/>
+          <a:ln>
+            <a:noFill/>
+          </a:ln>
+        </p:spPr>
+        <p:style>
+          <a:lnRef idx="2">
+            <a:schemeClr val="accent1">
+              <a:shade val="50000"/>
+            </a:schemeClr>
+          </a:lnRef>
+          <a:fillRef idx="1">
+            <a:schemeClr val="accent1"/>
+          </a:fillRef>
+          <a:effectRef idx="0">
+            <a:schemeClr val="accent1"/>
+          </a:effectRef>
+          <a:fontRef idx="minor">
+            <a:schemeClr val="lt1"/>
+          </a:fontRef>
+        </p:style>
+        <p:txBody>
+          <a:bodyPr rtlCol="0" anchor="ctr"/>
+          <a:lstStyle>
+            <a:defPPr>
+              <a:defRPr lang="en-US"/>
+            </a:defPPr>
+            <a:lvl1pPr marL="0" algn="l" defTabSz="914400" rtl="0" eaLnBrk="1" latinLnBrk="0" hangingPunct="1">
+              <a:defRPr sz="1800" kern="1200">
+                <a:solidFill>
+                  <a:schemeClr val="lt1"/>
+                </a:solidFill>
+                <a:latin typeface="+mn-lt"/>
+                <a:ea typeface="+mn-ea"/>
+                <a:cs typeface="+mn-cs"/>
+              </a:defRPr>
+            </a:lvl1pPr>
+            <a:lvl2pPr marL="457200" algn="l" defTabSz="914400" rtl="0" eaLnBrk="1" latinLnBrk="0" hangingPunct="1">
+              <a:defRPr sz="1800" kern="1200">
+                <a:solidFill>
+                  <a:schemeClr val="lt1"/>
+                </a:solidFill>
+                <a:latin typeface="+mn-lt"/>
+                <a:ea typeface="+mn-ea"/>
+                <a:cs typeface="+mn-cs"/>
+              </a:defRPr>
+            </a:lvl2pPr>
+            <a:lvl3pPr marL="914400" algn="l" defTabSz="914400" rtl="0" eaLnBrk="1" latinLnBrk="0" hangingPunct="1">
+              <a:defRPr sz="1800" kern="1200">
+                <a:solidFill>
+                  <a:schemeClr val="lt1"/>
+                </a:solidFill>
+                <a:latin typeface="+mn-lt"/>
+                <a:ea typeface="+mn-ea"/>
+                <a:cs typeface="+mn-cs"/>
+              </a:defRPr>
+            </a:lvl3pPr>
+            <a:lvl4pPr marL="1371600" algn="l" defTabSz="914400" rtl="0" eaLnBrk="1" latinLnBrk="0" hangingPunct="1">
+              <a:defRPr sz="1800" kern="1200">
+                <a:solidFill>
+                  <a:schemeClr val="lt1"/>
+                </a:solidFill>
+                <a:latin typeface="+mn-lt"/>
+                <a:ea typeface="+mn-ea"/>
+                <a:cs typeface="+mn-cs"/>
+              </a:defRPr>
+            </a:lvl4pPr>
+            <a:lvl5pPr marL="1828800" algn="l" defTabSz="914400" rtl="0" eaLnBrk="1" latinLnBrk="0" hangingPunct="1">
+              <a:defRPr sz="1800" kern="1200">
+                <a:solidFill>
+                  <a:schemeClr val="lt1"/>
+                </a:solidFill>
+                <a:latin typeface="+mn-lt"/>
+                <a:ea typeface="+mn-ea"/>
+                <a:cs typeface="+mn-cs"/>
+              </a:defRPr>
+            </a:lvl5pPr>
+            <a:lvl6pPr marL="2286000" algn="l" defTabSz="914400" rtl="0" eaLnBrk="1" latinLnBrk="0" hangingPunct="1">
+              <a:defRPr sz="1800" kern="1200">
+                <a:solidFill>
+                  <a:schemeClr val="lt1"/>
+                </a:solidFill>
+                <a:latin typeface="+mn-lt"/>
+                <a:ea typeface="+mn-ea"/>
+                <a:cs typeface="+mn-cs"/>
+              </a:defRPr>
+            </a:lvl6pPr>
+            <a:lvl7pPr marL="2743200" algn="l" defTabSz="914400" rtl="0" eaLnBrk="1" latinLnBrk="0" hangingPunct="1">
+              <a:defRPr sz="1800" kern="1200">
+                <a:solidFill>
+                  <a:schemeClr val="lt1"/>
+                </a:solidFill>
+                <a:latin typeface="+mn-lt"/>
+                <a:ea typeface="+mn-ea"/>
+                <a:cs typeface="+mn-cs"/>
+              </a:defRPr>
+            </a:lvl7pPr>
+            <a:lvl8pPr marL="3200400" algn="l" defTabSz="914400" rtl="0" eaLnBrk="1" latinLnBrk="0" hangingPunct="1">
+              <a:defRPr sz="1800" kern="1200">
+                <a:solidFill>
+                  <a:schemeClr val="lt1"/>
+                </a:solidFill>
+                <a:latin typeface="+mn-lt"/>
+                <a:ea typeface="+mn-ea"/>
+                <a:cs typeface="+mn-cs"/>
+              </a:defRPr>
+            </a:lvl8pPr>
+            <a:lvl9pPr marL="3657600" algn="l" defTabSz="914400" rtl="0" eaLnBrk="1" latinLnBrk="0" hangingPunct="1">
+              <a:defRPr sz="1800" kern="1200">
+                <a:solidFill>
+                  <a:schemeClr val="lt1"/>
+                </a:solidFill>
+                <a:latin typeface="+mn-lt"/>
+                <a:ea typeface="+mn-ea"/>
+                <a:cs typeface="+mn-cs"/>
+              </a:defRPr>
+            </a:lvl9pPr>
+          </a:lstStyle>
+          <a:p>
+            <a:pPr algn="ctr"/>
+            <a:endParaRPr lang="fr-FR" noProof="0" dirty="0"/>
+          </a:p>
+        </p:txBody>
+      </p:sp>
+      <p:sp>
+        <p:nvSpPr>
+          <p:cNvPr id="7" name="Content Placeholder 6">
+            <a:extLst>
+              <a:ext uri="{FF2B5EF4-FFF2-40B4-BE49-F238E27FC236}">
+                <a16:creationId xmlns:a16="http://schemas.microsoft.com/office/drawing/2014/main" id="{7ADCCA20-8D5E-55EC-7E9D-1427A49F79E4}"/>
               </a:ext>
             </a:extLst>
           </p:cNvPr>
@@ -5536,16 +6476,16 @@
           <a:bodyPr/>
           <a:lstStyle/>
           <a:p>
-            <a:endParaRPr lang="en-US"/>
+            <a:endParaRPr lang="fr-FR" noProof="0" dirty="0"/>
           </a:p>
         </p:txBody>
       </p:sp>
       <p:pic>
         <p:nvPicPr>
-          <p:cNvPr id="5" name="Picture 4">
-            <a:extLst>
-              <a:ext uri="{FF2B5EF4-FFF2-40B4-BE49-F238E27FC236}">
-                <a16:creationId xmlns:a16="http://schemas.microsoft.com/office/drawing/2014/main" id="{F8715254-FEEC-F2F5-ED9C-FDDAA96E4014}"/>
+          <p:cNvPr id="9" name="Picture 8">
+            <a:extLst>
+              <a:ext uri="{FF2B5EF4-FFF2-40B4-BE49-F238E27FC236}">
+                <a16:creationId xmlns:a16="http://schemas.microsoft.com/office/drawing/2014/main" id="{6319852B-BA11-F39F-C940-44AB8191841B}"/>
               </a:ext>
             </a:extLst>
           </p:cNvPr>
@@ -5555,7 +6495,7 @@
           <p:nvPr/>
         </p:nvPicPr>
         <p:blipFill>
-          <a:blip r:embed="rId2"/>
+          <a:blip r:embed="rId3"/>
           <a:stretch>
             <a:fillRect/>
           </a:stretch>
@@ -5573,7 +6513,7 @@
     </p:spTree>
     <p:extLst>
       <p:ext uri="{BB962C8B-B14F-4D97-AF65-F5344CB8AC3E}">
-        <p14:creationId xmlns:p14="http://schemas.microsoft.com/office/powerpoint/2010/main" val="377861202"/>
+        <p14:creationId xmlns:p14="http://schemas.microsoft.com/office/powerpoint/2010/main" val="3916479699"/>
       </p:ext>
     </p:extLst>
   </p:cSld>
@@ -5896,4 +6836,325 @@
     </a:ext>
   </a:extLst>
 </a:theme>
+</file>
+
+<file path=ppt/theme/theme2.xml><?xml version="1.0" encoding="utf-8"?>
+<a:theme xmlns:a="http://schemas.openxmlformats.org/drawingml/2006/main" name="Office Theme">
+  <a:themeElements>
+    <a:clrScheme name="Office">
+      <a:dk1>
+        <a:sysClr val="windowText" lastClr="000000"/>
+      </a:dk1>
+      <a:lt1>
+        <a:sysClr val="window" lastClr="FFFFFF"/>
+      </a:lt1>
+      <a:dk2>
+        <a:srgbClr val="0E2841"/>
+      </a:dk2>
+      <a:lt2>
+        <a:srgbClr val="E8E8E8"/>
+      </a:lt2>
+      <a:accent1>
+        <a:srgbClr val="156082"/>
+      </a:accent1>
+      <a:accent2>
+        <a:srgbClr val="E97132"/>
+      </a:accent2>
+      <a:accent3>
+        <a:srgbClr val="196B24"/>
+      </a:accent3>
+      <a:accent4>
+        <a:srgbClr val="0F9ED5"/>
+      </a:accent4>
+      <a:accent5>
+        <a:srgbClr val="A02B93"/>
+      </a:accent5>
+      <a:accent6>
+        <a:srgbClr val="4EA72E"/>
+      </a:accent6>
+      <a:hlink>
+        <a:srgbClr val="467886"/>
+      </a:hlink>
+      <a:folHlink>
+        <a:srgbClr val="96607D"/>
+      </a:folHlink>
+    </a:clrScheme>
+    <a:fontScheme name="Office">
+      <a:majorFont>
+        <a:latin typeface="Aptos Display" panose="02110004020202020204"/>
+        <a:ea typeface=""/>
+        <a:cs typeface=""/>
+        <a:font script="Jpan" typeface="游ゴシック Light"/>
+        <a:font script="Hang" typeface="맑은 고딕"/>
+        <a:font script="Hans" typeface="等线 Light"/>
+        <a:font script="Hant" typeface="新細明體"/>
+        <a:font script="Arab" typeface="Times New Roman"/>
+        <a:font script="Hebr" typeface="Times New Roman"/>
+        <a:font script="Thai" typeface="Angsana New"/>
+        <a:font script="Ethi" typeface="Nyala"/>
+        <a:font script="Beng" typeface="Vrinda"/>
+        <a:font script="Gujr" typeface="Shruti"/>
+        <a:font script="Khmr" typeface="MoolBoran"/>
+        <a:font script="Knda" typeface="Tunga"/>
+        <a:font script="Guru" typeface="Raavi"/>
+        <a:font script="Cans" typeface="Euphemia"/>
+        <a:font script="Cher" typeface="Plantagenet Cherokee"/>
+        <a:font script="Yiii" typeface="Microsoft Yi Baiti"/>
+        <a:font script="Tibt" typeface="Microsoft Himalaya"/>
+        <a:font script="Thaa" typeface="MV Boli"/>
+        <a:font script="Deva" typeface="Mangal"/>
+        <a:font script="Telu" typeface="Gautami"/>
+        <a:font script="Taml" typeface="Latha"/>
+        <a:font script="Syrc" typeface="Estrangelo Edessa"/>
+        <a:font script="Orya" typeface="Kalinga"/>
+        <a:font script="Mlym" typeface="Kartika"/>
+        <a:font script="Laoo" typeface="DokChampa"/>
+        <a:font script="Sinh" typeface="Iskoola Pota"/>
+        <a:font script="Mong" typeface="Mongolian Baiti"/>
+        <a:font script="Viet" typeface="Times New Roman"/>
+        <a:font script="Uigh" typeface="Microsoft Uighur"/>
+        <a:font script="Geor" typeface="Sylfaen"/>
+        <a:font script="Armn" typeface="Arial"/>
+        <a:font script="Bugi" typeface="Leelawadee UI"/>
+        <a:font script="Bopo" typeface="Microsoft JhengHei"/>
+        <a:font script="Java" typeface="Javanese Text"/>
+        <a:font script="Lisu" typeface="Segoe UI"/>
+        <a:font script="Mymr" typeface="Myanmar Text"/>
+        <a:font script="Nkoo" typeface="Ebrima"/>
+        <a:font script="Olck" typeface="Nirmala UI"/>
+        <a:font script="Osma" typeface="Ebrima"/>
+        <a:font script="Phag" typeface="Phagspa"/>
+        <a:font script="Syrn" typeface="Estrangelo Edessa"/>
+        <a:font script="Syrj" typeface="Estrangelo Edessa"/>
+        <a:font script="Syre" typeface="Estrangelo Edessa"/>
+        <a:font script="Sora" typeface="Nirmala UI"/>
+        <a:font script="Tale" typeface="Microsoft Tai Le"/>
+        <a:font script="Talu" typeface="Microsoft New Tai Lue"/>
+        <a:font script="Tfng" typeface="Ebrima"/>
+      </a:majorFont>
+      <a:minorFont>
+        <a:latin typeface="Aptos" panose="02110004020202020204"/>
+        <a:ea typeface=""/>
+        <a:cs typeface=""/>
+        <a:font script="Jpan" typeface="游ゴシック"/>
+        <a:font script="Hang" typeface="맑은 고딕"/>
+        <a:font script="Hans" typeface="等线"/>
+        <a:font script="Hant" typeface="新細明體"/>
+        <a:font script="Arab" typeface="Arial"/>
+        <a:font script="Hebr" typeface="Arial"/>
+        <a:font script="Thai" typeface="Cordia New"/>
+        <a:font script="Ethi" typeface="Nyala"/>
+        <a:font script="Beng" typeface="Vrinda"/>
+        <a:font script="Gujr" typeface="Shruti"/>
+        <a:font script="Khmr" typeface="DaunPenh"/>
+        <a:font script="Knda" typeface="Tunga"/>
+        <a:font script="Guru" typeface="Raavi"/>
+        <a:font script="Cans" typeface="Euphemia"/>
+        <a:font script="Cher" typeface="Plantagenet Cherokee"/>
+        <a:font script="Yiii" typeface="Microsoft Yi Baiti"/>
+        <a:font script="Tibt" typeface="Microsoft Himalaya"/>
+        <a:font script="Thaa" typeface="MV Boli"/>
+        <a:font script="Deva" typeface="Mangal"/>
+        <a:font script="Telu" typeface="Gautami"/>
+        <a:font script="Taml" typeface="Latha"/>
+        <a:font script="Syrc" typeface="Estrangelo Edessa"/>
+        <a:font script="Orya" typeface="Kalinga"/>
+        <a:font script="Mlym" typeface="Kartika"/>
+        <a:font script="Laoo" typeface="DokChampa"/>
+        <a:font script="Sinh" typeface="Iskoola Pota"/>
+        <a:font script="Mong" typeface="Mongolian Baiti"/>
+        <a:font script="Viet" typeface="Arial"/>
+        <a:font script="Uigh" typeface="Microsoft Uighur"/>
+        <a:font script="Geor" typeface="Sylfaen"/>
+        <a:font script="Armn" typeface="Arial"/>
+        <a:font script="Bugi" typeface="Leelawadee UI"/>
+        <a:font script="Bopo" typeface="Microsoft JhengHei"/>
+        <a:font script="Java" typeface="Javanese Text"/>
+        <a:font script="Lisu" typeface="Segoe UI"/>
+        <a:font script="Mymr" typeface="Myanmar Text"/>
+        <a:font script="Nkoo" typeface="Ebrima"/>
+        <a:font script="Olck" typeface="Nirmala UI"/>
+        <a:font script="Osma" typeface="Ebrima"/>
+        <a:font script="Phag" typeface="Phagspa"/>
+        <a:font script="Syrn" typeface="Estrangelo Edessa"/>
+        <a:font script="Syrj" typeface="Estrangelo Edessa"/>
+        <a:font script="Syre" typeface="Estrangelo Edessa"/>
+        <a:font script="Sora" typeface="Nirmala UI"/>
+        <a:font script="Tale" typeface="Microsoft Tai Le"/>
+        <a:font script="Talu" typeface="Microsoft New Tai Lue"/>
+        <a:font script="Tfng" typeface="Ebrima"/>
+      </a:minorFont>
+    </a:fontScheme>
+    <a:fmtScheme name="Office">
+      <a:fillStyleLst>
+        <a:solidFill>
+          <a:schemeClr val="phClr"/>
+        </a:solidFill>
+        <a:gradFill rotWithShape="1">
+          <a:gsLst>
+            <a:gs pos="0">
+              <a:schemeClr val="phClr">
+                <a:lumMod val="110000"/>
+                <a:satMod val="105000"/>
+                <a:tint val="67000"/>
+              </a:schemeClr>
+            </a:gs>
+            <a:gs pos="50000">
+              <a:schemeClr val="phClr">
+                <a:lumMod val="105000"/>
+                <a:satMod val="103000"/>
+                <a:tint val="73000"/>
+              </a:schemeClr>
+            </a:gs>
+            <a:gs pos="100000">
+              <a:schemeClr val="phClr">
+                <a:lumMod val="105000"/>
+                <a:satMod val="109000"/>
+                <a:tint val="81000"/>
+              </a:schemeClr>
+            </a:gs>
+          </a:gsLst>
+          <a:lin ang="5400000" scaled="0"/>
+        </a:gradFill>
+        <a:gradFill rotWithShape="1">
+          <a:gsLst>
+            <a:gs pos="0">
+              <a:schemeClr val="phClr">
+                <a:satMod val="103000"/>
+                <a:lumMod val="102000"/>
+                <a:tint val="94000"/>
+              </a:schemeClr>
+            </a:gs>
+            <a:gs pos="50000">
+              <a:schemeClr val="phClr">
+                <a:satMod val="110000"/>
+                <a:lumMod val="100000"/>
+                <a:shade val="100000"/>
+              </a:schemeClr>
+            </a:gs>
+            <a:gs pos="100000">
+              <a:schemeClr val="phClr">
+                <a:lumMod val="99000"/>
+                <a:satMod val="120000"/>
+                <a:shade val="78000"/>
+              </a:schemeClr>
+            </a:gs>
+          </a:gsLst>
+          <a:lin ang="5400000" scaled="0"/>
+        </a:gradFill>
+      </a:fillStyleLst>
+      <a:lnStyleLst>
+        <a:ln w="12700" cap="flat" cmpd="sng" algn="ctr">
+          <a:solidFill>
+            <a:schemeClr val="phClr"/>
+          </a:solidFill>
+          <a:prstDash val="solid"/>
+          <a:miter lim="800000"/>
+        </a:ln>
+        <a:ln w="19050" cap="flat" cmpd="sng" algn="ctr">
+          <a:solidFill>
+            <a:schemeClr val="phClr"/>
+          </a:solidFill>
+          <a:prstDash val="solid"/>
+          <a:miter lim="800000"/>
+        </a:ln>
+        <a:ln w="25400" cap="flat" cmpd="sng" algn="ctr">
+          <a:solidFill>
+            <a:schemeClr val="phClr"/>
+          </a:solidFill>
+          <a:prstDash val="solid"/>
+          <a:miter lim="800000"/>
+        </a:ln>
+      </a:lnStyleLst>
+      <a:effectStyleLst>
+        <a:effectStyle>
+          <a:effectLst/>
+        </a:effectStyle>
+        <a:effectStyle>
+          <a:effectLst/>
+        </a:effectStyle>
+        <a:effectStyle>
+          <a:effectLst>
+            <a:outerShdw blurRad="57150" dist="19050" dir="5400000" algn="ctr" rotWithShape="0">
+              <a:srgbClr val="000000">
+                <a:alpha val="63000"/>
+              </a:srgbClr>
+            </a:outerShdw>
+          </a:effectLst>
+        </a:effectStyle>
+      </a:effectStyleLst>
+      <a:bgFillStyleLst>
+        <a:solidFill>
+          <a:schemeClr val="phClr"/>
+        </a:solidFill>
+        <a:solidFill>
+          <a:schemeClr val="phClr">
+            <a:tint val="95000"/>
+            <a:satMod val="170000"/>
+          </a:schemeClr>
+        </a:solidFill>
+        <a:gradFill rotWithShape="1">
+          <a:gsLst>
+            <a:gs pos="0">
+              <a:schemeClr val="phClr">
+                <a:tint val="93000"/>
+                <a:satMod val="150000"/>
+                <a:shade val="98000"/>
+                <a:lumMod val="102000"/>
+              </a:schemeClr>
+            </a:gs>
+            <a:gs pos="50000">
+              <a:schemeClr val="phClr">
+                <a:tint val="98000"/>
+                <a:satMod val="130000"/>
+                <a:shade val="90000"/>
+                <a:lumMod val="103000"/>
+              </a:schemeClr>
+            </a:gs>
+            <a:gs pos="100000">
+              <a:schemeClr val="phClr">
+                <a:shade val="63000"/>
+                <a:satMod val="120000"/>
+              </a:schemeClr>
+            </a:gs>
+          </a:gsLst>
+          <a:lin ang="5400000" scaled="0"/>
+        </a:gradFill>
+      </a:bgFillStyleLst>
+    </a:fmtScheme>
+  </a:themeElements>
+  <a:objectDefaults>
+    <a:lnDef>
+      <a:spPr/>
+      <a:bodyPr/>
+      <a:lstStyle/>
+      <a:style>
+        <a:lnRef idx="2">
+          <a:schemeClr val="accent1"/>
+        </a:lnRef>
+        <a:fillRef idx="0">
+          <a:schemeClr val="accent1"/>
+        </a:fillRef>
+        <a:effectRef idx="1">
+          <a:schemeClr val="accent1"/>
+        </a:effectRef>
+        <a:fontRef idx="minor">
+          <a:schemeClr val="tx1"/>
+        </a:fontRef>
+      </a:style>
+    </a:lnDef>
+  </a:objectDefaults>
+  <a:extraClrSchemeLst/>
+  <a:extLst>
+    <a:ext uri="{05A4C25C-085E-4340-85A3-A5531E510DB2}">
+      <thm15:themeFamily xmlns:thm15="http://schemas.microsoft.com/office/thememl/2012/main" name="Office Theme" id="{2E142A2C-CD16-42D6-873A-C26D2A0506FA}" vid="{1BDDFF52-6CD6-40A5-AB3C-68EB2F1E4D0A}"/>
+    </a:ext>
+  </a:extLst>
+</a:theme>
+</file>
+
+<file path=docMetadata/LabelInfo.xml><?xml version="1.0" encoding="utf-8"?>
+<clbl:labelList xmlns:clbl="http://schemas.microsoft.com/office/2020/mipLabelMetadata">
+  <clbl:label id="{9a839770-e9fc-4737-905c-370f65b0e224}" enabled="0" method="" siteId="{9a839770-e9fc-4737-905c-370f65b0e224}" removed="1"/>
+</clbl:labelList>
 </file>